--- a/04.Langchain_Structured_output_21_March-2session/LangChain_Structured_Output_Part3B.pptx
+++ b/04.Langchain_Structured_output_21_March-2session/LangChain_Structured_Output_Part3B.pptx
@@ -70,20 +70,17 @@
             <a:noAutofit/>
           </a:bodyPr>
           <a:p>
-            <a:r>
-              <a:rPr b="0" lang="en-IN" sz="1800" spc="-1" strike="noStrike">
-                <a:solidFill>
-                  <a:srgbClr val="000000"/>
-                </a:solidFill>
-                <a:latin typeface="Calibri"/>
+            <a:pPr algn="ctr">
+              <a:buNone/>
+            </a:pPr>
+            <a:r>
+              <a:rPr b="0" lang="en-IN" sz="4400" spc="-1" strike="noStrike">
+                <a:latin typeface="Arial"/>
               </a:rPr>
               <a:t>Click to move the slide</a:t>
             </a:r>
-            <a:endParaRPr b="0" lang="en-IN" sz="1800" spc="-1" strike="noStrike">
-              <a:solidFill>
-                <a:srgbClr val="000000"/>
-              </a:solidFill>
-              <a:latin typeface="Calibri"/>
+            <a:endParaRPr b="0" lang="en-IN" sz="4400" spc="-1" strike="noStrike">
+              <a:latin typeface="Arial"/>
             </a:endParaRPr>
           </a:p>
         </p:txBody>
@@ -305,7 +302,7 @@
             <a:pPr algn="r">
               <a:buNone/>
             </a:pPr>
-            <a:fld id="{58B08041-0CF1-4DD6-BC44-3CF2F597AA95}" type="slidenum">
+            <a:fld id="{7A13DFBA-2031-4326-B6D0-CDF027C0DAF4}" type="slidenum">
               <a:rPr b="0" lang="en-IN" sz="1400" spc="-1" strike="noStrike">
                 <a:latin typeface="Times New Roman"/>
               </a:rPr>
@@ -353,7 +350,7 @@
         <p:spPr>
           <a:xfrm>
             <a:off x="685800" y="1143000"/>
-            <a:ext cx="5486040" cy="3085920"/>
+            <a:ext cx="5485680" cy="3085560"/>
           </a:xfrm>
           <a:prstGeom prst="rect">
             <a:avLst/>
@@ -376,7 +373,7 @@
         <p:spPr>
           <a:xfrm>
             <a:off x="685800" y="4400640"/>
-            <a:ext cx="5486040" cy="3600000"/>
+            <a:ext cx="5485680" cy="3599640"/>
           </a:xfrm>
           <a:prstGeom prst="rect">
             <a:avLst/>
@@ -387,7 +384,7 @@
           </a:ln>
         </p:spPr>
         <p:txBody>
-          <a:bodyPr anchor="t">
+          <a:bodyPr lIns="0" rIns="0" tIns="0" bIns="0" anchor="t">
             <a:noAutofit/>
           </a:bodyPr>
           <a:p>
@@ -410,7 +407,7 @@
         <p:spPr>
           <a:xfrm>
             <a:off x="3884760" y="8685360"/>
-            <a:ext cx="2971440" cy="458280"/>
+            <a:ext cx="2971080" cy="457920"/>
           </a:xfrm>
           <a:prstGeom prst="rect">
             <a:avLst/>
@@ -421,7 +418,7 @@
           </a:ln>
         </p:spPr>
         <p:txBody>
-          <a:bodyPr anchor="b">
+          <a:bodyPr lIns="0" rIns="0" tIns="0" bIns="0" anchor="b">
             <a:noAutofit/>
           </a:bodyPr>
           <a:lstStyle>
@@ -446,7 +443,7 @@
               </a:lnSpc>
               <a:buNone/>
             </a:pPr>
-            <a:fld id="{44297E31-4D79-4746-A3E7-289E7C09C013}" type="slidenum">
+            <a:fld id="{BC71E6DE-2C6D-4E95-A19E-3EDCC396C6E5}" type="slidenum">
               <a:rPr b="0" lang="en-US" sz="1200" spc="-1" strike="noStrike">
                 <a:solidFill>
                   <a:srgbClr val="000000"/>
@@ -497,7 +494,7 @@
         <p:spPr>
           <a:xfrm>
             <a:off x="685800" y="1143000"/>
-            <a:ext cx="5486040" cy="3085920"/>
+            <a:ext cx="5485680" cy="3085560"/>
           </a:xfrm>
           <a:prstGeom prst="rect">
             <a:avLst/>
@@ -520,7 +517,7 @@
         <p:spPr>
           <a:xfrm>
             <a:off x="685800" y="4400640"/>
-            <a:ext cx="5486040" cy="3600000"/>
+            <a:ext cx="5485680" cy="3599640"/>
           </a:xfrm>
           <a:prstGeom prst="rect">
             <a:avLst/>
@@ -531,7 +528,7 @@
           </a:ln>
         </p:spPr>
         <p:txBody>
-          <a:bodyPr anchor="t">
+          <a:bodyPr lIns="0" rIns="0" tIns="0" bIns="0" anchor="t">
             <a:noAutofit/>
           </a:bodyPr>
           <a:p>
@@ -554,7 +551,7 @@
         <p:spPr>
           <a:xfrm>
             <a:off x="3884760" y="8685360"/>
-            <a:ext cx="2971440" cy="458280"/>
+            <a:ext cx="2971080" cy="457920"/>
           </a:xfrm>
           <a:prstGeom prst="rect">
             <a:avLst/>
@@ -565,7 +562,7 @@
           </a:ln>
         </p:spPr>
         <p:txBody>
-          <a:bodyPr anchor="b">
+          <a:bodyPr lIns="0" rIns="0" tIns="0" bIns="0" anchor="b">
             <a:noAutofit/>
           </a:bodyPr>
           <a:lstStyle>
@@ -590,7 +587,7 @@
               </a:lnSpc>
               <a:buNone/>
             </a:pPr>
-            <a:fld id="{C2EFD0D6-938C-407C-A1EA-5191EB03A3ED}" type="slidenum">
+            <a:fld id="{1EE0B2F5-0B71-4867-9FAA-B456FACC945E}" type="slidenum">
               <a:rPr b="0" lang="en-US" sz="1200" spc="-1" strike="noStrike">
                 <a:solidFill>
                   <a:srgbClr val="000000"/>
@@ -641,7 +638,7 @@
         <p:spPr>
           <a:xfrm>
             <a:off x="685800" y="1143000"/>
-            <a:ext cx="5486040" cy="3085920"/>
+            <a:ext cx="5485680" cy="3085560"/>
           </a:xfrm>
           <a:prstGeom prst="rect">
             <a:avLst/>
@@ -664,7 +661,7 @@
         <p:spPr>
           <a:xfrm>
             <a:off x="685800" y="4400640"/>
-            <a:ext cx="5486040" cy="3600000"/>
+            <a:ext cx="5485680" cy="3599640"/>
           </a:xfrm>
           <a:prstGeom prst="rect">
             <a:avLst/>
@@ -675,7 +672,7 @@
           </a:ln>
         </p:spPr>
         <p:txBody>
-          <a:bodyPr anchor="t">
+          <a:bodyPr lIns="0" rIns="0" tIns="0" bIns="0" anchor="t">
             <a:noAutofit/>
           </a:bodyPr>
           <a:p>
@@ -698,7 +695,7 @@
         <p:spPr>
           <a:xfrm>
             <a:off x="3884760" y="8685360"/>
-            <a:ext cx="2971440" cy="458280"/>
+            <a:ext cx="2971080" cy="457920"/>
           </a:xfrm>
           <a:prstGeom prst="rect">
             <a:avLst/>
@@ -709,7 +706,7 @@
           </a:ln>
         </p:spPr>
         <p:txBody>
-          <a:bodyPr anchor="b">
+          <a:bodyPr lIns="0" rIns="0" tIns="0" bIns="0" anchor="b">
             <a:noAutofit/>
           </a:bodyPr>
           <a:lstStyle>
@@ -734,7 +731,7 @@
               </a:lnSpc>
               <a:buNone/>
             </a:pPr>
-            <a:fld id="{9BAD60CD-907E-4BFF-8EA0-BF34F741F68B}" type="slidenum">
+            <a:fld id="{76E74CCE-7FFA-4C06-B4F4-077C1F79FA91}" type="slidenum">
               <a:rPr b="0" lang="en-US" sz="1200" spc="-1" strike="noStrike">
                 <a:solidFill>
                   <a:srgbClr val="000000"/>
@@ -785,7 +782,7 @@
         <p:spPr>
           <a:xfrm>
             <a:off x="685800" y="1143000"/>
-            <a:ext cx="5486040" cy="3085920"/>
+            <a:ext cx="5485680" cy="3085560"/>
           </a:xfrm>
           <a:prstGeom prst="rect">
             <a:avLst/>
@@ -808,7 +805,7 @@
         <p:spPr>
           <a:xfrm>
             <a:off x="685800" y="4400640"/>
-            <a:ext cx="5486040" cy="3600000"/>
+            <a:ext cx="5485680" cy="3599640"/>
           </a:xfrm>
           <a:prstGeom prst="rect">
             <a:avLst/>
@@ -819,7 +816,7 @@
           </a:ln>
         </p:spPr>
         <p:txBody>
-          <a:bodyPr anchor="t">
+          <a:bodyPr lIns="0" rIns="0" tIns="0" bIns="0" anchor="t">
             <a:noAutofit/>
           </a:bodyPr>
           <a:p>
@@ -842,7 +839,7 @@
         <p:spPr>
           <a:xfrm>
             <a:off x="3884760" y="8685360"/>
-            <a:ext cx="2971440" cy="458280"/>
+            <a:ext cx="2971080" cy="457920"/>
           </a:xfrm>
           <a:prstGeom prst="rect">
             <a:avLst/>
@@ -853,7 +850,7 @@
           </a:ln>
         </p:spPr>
         <p:txBody>
-          <a:bodyPr anchor="b">
+          <a:bodyPr lIns="0" rIns="0" tIns="0" bIns="0" anchor="b">
             <a:noAutofit/>
           </a:bodyPr>
           <a:lstStyle>
@@ -878,7 +875,7 @@
               </a:lnSpc>
               <a:buNone/>
             </a:pPr>
-            <a:fld id="{90725EC0-725B-4150-9BE6-71B685CED55C}" type="slidenum">
+            <a:fld id="{FDD59A4F-D4F6-4795-BB1C-16C329C26109}" type="slidenum">
               <a:rPr b="0" lang="en-US" sz="1200" spc="-1" strike="noStrike">
                 <a:solidFill>
                   <a:srgbClr val="000000"/>
@@ -929,7 +926,7 @@
         <p:spPr>
           <a:xfrm>
             <a:off x="685800" y="1143000"/>
-            <a:ext cx="5486040" cy="3085920"/>
+            <a:ext cx="5485680" cy="3085560"/>
           </a:xfrm>
           <a:prstGeom prst="rect">
             <a:avLst/>
@@ -952,7 +949,7 @@
         <p:spPr>
           <a:xfrm>
             <a:off x="685800" y="4400640"/>
-            <a:ext cx="5486040" cy="3600000"/>
+            <a:ext cx="5485680" cy="3599640"/>
           </a:xfrm>
           <a:prstGeom prst="rect">
             <a:avLst/>
@@ -963,7 +960,7 @@
           </a:ln>
         </p:spPr>
         <p:txBody>
-          <a:bodyPr anchor="t">
+          <a:bodyPr lIns="0" rIns="0" tIns="0" bIns="0" anchor="t">
             <a:noAutofit/>
           </a:bodyPr>
           <a:p>
@@ -986,7 +983,7 @@
         <p:spPr>
           <a:xfrm>
             <a:off x="3884760" y="8685360"/>
-            <a:ext cx="2971440" cy="458280"/>
+            <a:ext cx="2971080" cy="457920"/>
           </a:xfrm>
           <a:prstGeom prst="rect">
             <a:avLst/>
@@ -997,7 +994,7 @@
           </a:ln>
         </p:spPr>
         <p:txBody>
-          <a:bodyPr anchor="b">
+          <a:bodyPr lIns="0" rIns="0" tIns="0" bIns="0" anchor="b">
             <a:noAutofit/>
           </a:bodyPr>
           <a:lstStyle>
@@ -1022,7 +1019,7 @@
               </a:lnSpc>
               <a:buNone/>
             </a:pPr>
-            <a:fld id="{861B1720-712C-4E95-96ED-C2092B881DFB}" type="slidenum">
+            <a:fld id="{65CF45C1-A6EF-41E7-8155-1BF0BC9F7C3F}" type="slidenum">
               <a:rPr b="0" lang="en-US" sz="1200" spc="-1" strike="noStrike">
                 <a:solidFill>
                   <a:srgbClr val="000000"/>
@@ -1073,7 +1070,7 @@
         <p:spPr>
           <a:xfrm>
             <a:off x="685800" y="1143000"/>
-            <a:ext cx="5486040" cy="3085920"/>
+            <a:ext cx="5485680" cy="3085560"/>
           </a:xfrm>
           <a:prstGeom prst="rect">
             <a:avLst/>
@@ -1096,7 +1093,7 @@
         <p:spPr>
           <a:xfrm>
             <a:off x="685800" y="4400640"/>
-            <a:ext cx="5486040" cy="3600000"/>
+            <a:ext cx="5485680" cy="3599640"/>
           </a:xfrm>
           <a:prstGeom prst="rect">
             <a:avLst/>
@@ -1107,7 +1104,7 @@
           </a:ln>
         </p:spPr>
         <p:txBody>
-          <a:bodyPr anchor="t">
+          <a:bodyPr lIns="0" rIns="0" tIns="0" bIns="0" anchor="t">
             <a:noAutofit/>
           </a:bodyPr>
           <a:p>
@@ -1130,7 +1127,7 @@
         <p:spPr>
           <a:xfrm>
             <a:off x="3884760" y="8685360"/>
-            <a:ext cx="2971440" cy="458280"/>
+            <a:ext cx="2971080" cy="457920"/>
           </a:xfrm>
           <a:prstGeom prst="rect">
             <a:avLst/>
@@ -1141,7 +1138,7 @@
           </a:ln>
         </p:spPr>
         <p:txBody>
-          <a:bodyPr anchor="b">
+          <a:bodyPr lIns="0" rIns="0" tIns="0" bIns="0" anchor="b">
             <a:noAutofit/>
           </a:bodyPr>
           <a:lstStyle>
@@ -1166,7 +1163,7 @@
               </a:lnSpc>
               <a:buNone/>
             </a:pPr>
-            <a:fld id="{CDD450E6-ED86-47B0-9906-03145DA963E2}" type="slidenum">
+            <a:fld id="{C12E6F10-C21F-4936-93EE-CEA8335BCE37}" type="slidenum">
               <a:rPr b="0" lang="en-US" sz="1200" spc="-1" strike="noStrike">
                 <a:solidFill>
                   <a:srgbClr val="000000"/>
@@ -1217,7 +1214,7 @@
         <p:spPr>
           <a:xfrm>
             <a:off x="685800" y="1143000"/>
-            <a:ext cx="5486040" cy="3085920"/>
+            <a:ext cx="5485680" cy="3085560"/>
           </a:xfrm>
           <a:prstGeom prst="rect">
             <a:avLst/>
@@ -1240,7 +1237,7 @@
         <p:spPr>
           <a:xfrm>
             <a:off x="685800" y="4400640"/>
-            <a:ext cx="5486040" cy="3600000"/>
+            <a:ext cx="5485680" cy="3599640"/>
           </a:xfrm>
           <a:prstGeom prst="rect">
             <a:avLst/>
@@ -1251,7 +1248,7 @@
           </a:ln>
         </p:spPr>
         <p:txBody>
-          <a:bodyPr anchor="t">
+          <a:bodyPr lIns="0" rIns="0" tIns="0" bIns="0" anchor="t">
             <a:noAutofit/>
           </a:bodyPr>
           <a:p>
@@ -1274,7 +1271,7 @@
         <p:spPr>
           <a:xfrm>
             <a:off x="3884760" y="8685360"/>
-            <a:ext cx="2971440" cy="458280"/>
+            <a:ext cx="2971080" cy="457920"/>
           </a:xfrm>
           <a:prstGeom prst="rect">
             <a:avLst/>
@@ -1285,7 +1282,7 @@
           </a:ln>
         </p:spPr>
         <p:txBody>
-          <a:bodyPr anchor="b">
+          <a:bodyPr lIns="0" rIns="0" tIns="0" bIns="0" anchor="b">
             <a:noAutofit/>
           </a:bodyPr>
           <a:lstStyle>
@@ -1310,7 +1307,7 @@
               </a:lnSpc>
               <a:buNone/>
             </a:pPr>
-            <a:fld id="{83170618-85CA-49BF-A889-C8564FF77802}" type="slidenum">
+            <a:fld id="{6CBDE774-2347-4A4C-B50B-197A0700EFA2}" type="slidenum">
               <a:rPr b="0" lang="en-US" sz="1200" spc="-1" strike="noStrike">
                 <a:solidFill>
                   <a:srgbClr val="000000"/>
@@ -1361,7 +1358,7 @@
         <p:spPr>
           <a:xfrm>
             <a:off x="685800" y="1143000"/>
-            <a:ext cx="5486040" cy="3085920"/>
+            <a:ext cx="5485680" cy="3085560"/>
           </a:xfrm>
           <a:prstGeom prst="rect">
             <a:avLst/>
@@ -1384,7 +1381,7 @@
         <p:spPr>
           <a:xfrm>
             <a:off x="685800" y="4400640"/>
-            <a:ext cx="5486040" cy="3600000"/>
+            <a:ext cx="5485680" cy="3599640"/>
           </a:xfrm>
           <a:prstGeom prst="rect">
             <a:avLst/>
@@ -1395,7 +1392,7 @@
           </a:ln>
         </p:spPr>
         <p:txBody>
-          <a:bodyPr anchor="t">
+          <a:bodyPr lIns="0" rIns="0" tIns="0" bIns="0" anchor="t">
             <a:noAutofit/>
           </a:bodyPr>
           <a:p>
@@ -1418,7 +1415,7 @@
         <p:spPr>
           <a:xfrm>
             <a:off x="3884760" y="8685360"/>
-            <a:ext cx="2971440" cy="458280"/>
+            <a:ext cx="2971080" cy="457920"/>
           </a:xfrm>
           <a:prstGeom prst="rect">
             <a:avLst/>
@@ -1429,7 +1426,7 @@
           </a:ln>
         </p:spPr>
         <p:txBody>
-          <a:bodyPr anchor="b">
+          <a:bodyPr lIns="0" rIns="0" tIns="0" bIns="0" anchor="b">
             <a:noAutofit/>
           </a:bodyPr>
           <a:lstStyle>
@@ -1454,7 +1451,7 @@
               </a:lnSpc>
               <a:buNone/>
             </a:pPr>
-            <a:fld id="{5F19D169-0208-4A19-A8BC-2619FF5B780A}" type="slidenum">
+            <a:fld id="{2EB902AC-BB4C-4406-A995-1780F2BA231C}" type="slidenum">
               <a:rPr b="0" lang="en-US" sz="1200" spc="-1" strike="noStrike">
                 <a:solidFill>
                   <a:srgbClr val="000000"/>
@@ -1505,7 +1502,7 @@
         <p:spPr>
           <a:xfrm>
             <a:off x="685800" y="1143000"/>
-            <a:ext cx="5486040" cy="3085920"/>
+            <a:ext cx="5485680" cy="3085560"/>
           </a:xfrm>
           <a:prstGeom prst="rect">
             <a:avLst/>
@@ -1528,7 +1525,7 @@
         <p:spPr>
           <a:xfrm>
             <a:off x="685800" y="4400640"/>
-            <a:ext cx="5486040" cy="3600000"/>
+            <a:ext cx="5485680" cy="3599640"/>
           </a:xfrm>
           <a:prstGeom prst="rect">
             <a:avLst/>
@@ -1539,7 +1536,7 @@
           </a:ln>
         </p:spPr>
         <p:txBody>
-          <a:bodyPr anchor="t">
+          <a:bodyPr lIns="0" rIns="0" tIns="0" bIns="0" anchor="t">
             <a:noAutofit/>
           </a:bodyPr>
           <a:p>
@@ -1562,7 +1559,7 @@
         <p:spPr>
           <a:xfrm>
             <a:off x="3884760" y="8685360"/>
-            <a:ext cx="2971440" cy="458280"/>
+            <a:ext cx="2971080" cy="457920"/>
           </a:xfrm>
           <a:prstGeom prst="rect">
             <a:avLst/>
@@ -1573,7 +1570,7 @@
           </a:ln>
         </p:spPr>
         <p:txBody>
-          <a:bodyPr anchor="b">
+          <a:bodyPr lIns="0" rIns="0" tIns="0" bIns="0" anchor="b">
             <a:noAutofit/>
           </a:bodyPr>
           <a:lstStyle>
@@ -1598,7 +1595,7 @@
               </a:lnSpc>
               <a:buNone/>
             </a:pPr>
-            <a:fld id="{91C6C86F-2183-4B23-B5CA-2E9AF370E1BD}" type="slidenum">
+            <a:fld id="{9871400E-C4BF-42B4-853F-F61A7337ABF6}" type="slidenum">
               <a:rPr b="0" lang="en-US" sz="1200" spc="-1" strike="noStrike">
                 <a:solidFill>
                   <a:srgbClr val="000000"/>
@@ -1649,7 +1646,7 @@
         <p:spPr>
           <a:xfrm>
             <a:off x="685800" y="1143000"/>
-            <a:ext cx="5486040" cy="3085920"/>
+            <a:ext cx="5485680" cy="3085560"/>
           </a:xfrm>
           <a:prstGeom prst="rect">
             <a:avLst/>
@@ -1672,7 +1669,7 @@
         <p:spPr>
           <a:xfrm>
             <a:off x="685800" y="4400640"/>
-            <a:ext cx="5486040" cy="3600000"/>
+            <a:ext cx="5485680" cy="3599640"/>
           </a:xfrm>
           <a:prstGeom prst="rect">
             <a:avLst/>
@@ -1683,7 +1680,7 @@
           </a:ln>
         </p:spPr>
         <p:txBody>
-          <a:bodyPr anchor="t">
+          <a:bodyPr lIns="0" rIns="0" tIns="0" bIns="0" anchor="t">
             <a:noAutofit/>
           </a:bodyPr>
           <a:p>
@@ -1706,7 +1703,7 @@
         <p:spPr>
           <a:xfrm>
             <a:off x="3884760" y="8685360"/>
-            <a:ext cx="2971440" cy="458280"/>
+            <a:ext cx="2971080" cy="457920"/>
           </a:xfrm>
           <a:prstGeom prst="rect">
             <a:avLst/>
@@ -1717,7 +1714,7 @@
           </a:ln>
         </p:spPr>
         <p:txBody>
-          <a:bodyPr anchor="b">
+          <a:bodyPr lIns="0" rIns="0" tIns="0" bIns="0" anchor="b">
             <a:noAutofit/>
           </a:bodyPr>
           <a:lstStyle>
@@ -1742,7 +1739,7 @@
               </a:lnSpc>
               <a:buNone/>
             </a:pPr>
-            <a:fld id="{E840FF96-E2FB-4C0D-87E8-8AB8E74EABFF}" type="slidenum">
+            <a:fld id="{41846317-A26D-4CD5-BCBF-49EBD45B965D}" type="slidenum">
               <a:rPr b="0" lang="en-US" sz="1200" spc="-1" strike="noStrike">
                 <a:solidFill>
                   <a:srgbClr val="000000"/>
@@ -1793,7 +1790,7 @@
         <p:spPr>
           <a:xfrm>
             <a:off x="685800" y="1143000"/>
-            <a:ext cx="5486040" cy="3085920"/>
+            <a:ext cx="5485680" cy="3085560"/>
           </a:xfrm>
           <a:prstGeom prst="rect">
             <a:avLst/>
@@ -1816,7 +1813,7 @@
         <p:spPr>
           <a:xfrm>
             <a:off x="685800" y="4400640"/>
-            <a:ext cx="5486040" cy="3600000"/>
+            <a:ext cx="5485680" cy="3599640"/>
           </a:xfrm>
           <a:prstGeom prst="rect">
             <a:avLst/>
@@ -1827,7 +1824,7 @@
           </a:ln>
         </p:spPr>
         <p:txBody>
-          <a:bodyPr anchor="t">
+          <a:bodyPr lIns="0" rIns="0" tIns="0" bIns="0" anchor="t">
             <a:noAutofit/>
           </a:bodyPr>
           <a:p>
@@ -1850,7 +1847,7 @@
         <p:spPr>
           <a:xfrm>
             <a:off x="3884760" y="8685360"/>
-            <a:ext cx="2971440" cy="458280"/>
+            <a:ext cx="2971080" cy="457920"/>
           </a:xfrm>
           <a:prstGeom prst="rect">
             <a:avLst/>
@@ -1861,7 +1858,7 @@
           </a:ln>
         </p:spPr>
         <p:txBody>
-          <a:bodyPr anchor="b">
+          <a:bodyPr lIns="0" rIns="0" tIns="0" bIns="0" anchor="b">
             <a:noAutofit/>
           </a:bodyPr>
           <a:lstStyle>
@@ -1886,7 +1883,7 @@
               </a:lnSpc>
               <a:buNone/>
             </a:pPr>
-            <a:fld id="{6F522787-B3CA-4502-A902-0F504A1FBE0E}" type="slidenum">
+            <a:fld id="{E7923BC4-8441-49AF-BF1B-7573EF1D6902}" type="slidenum">
               <a:rPr b="0" lang="en-US" sz="1200" spc="-1" strike="noStrike">
                 <a:solidFill>
                   <a:srgbClr val="000000"/>
@@ -1974,11 +1971,11 @@
             <a:noAutofit/>
           </a:bodyPr>
           <a:p>
-            <a:endParaRPr b="0" lang="en-IN" sz="1800" spc="-1" strike="noStrike">
-              <a:solidFill>
-                <a:srgbClr val="000000"/>
-              </a:solidFill>
-              <a:latin typeface="Calibri"/>
+            <a:pPr algn="ctr">
+              <a:buNone/>
+            </a:pPr>
+            <a:endParaRPr b="0" lang="en-IN" sz="4400" spc="-1" strike="noStrike">
+              <a:latin typeface="Arial"/>
             </a:endParaRPr>
           </a:p>
         </p:txBody>
@@ -2012,10 +2009,7 @@
           </a:bodyPr>
           <a:p>
             <a:endParaRPr b="0" lang="en-IN" sz="3200" spc="-1" strike="noStrike">
-              <a:solidFill>
-                <a:srgbClr val="000000"/>
-              </a:solidFill>
-              <a:latin typeface="Calibri"/>
+              <a:latin typeface="Arial"/>
             </a:endParaRPr>
           </a:p>
         </p:txBody>
@@ -2049,10 +2043,7 @@
           </a:bodyPr>
           <a:p>
             <a:endParaRPr b="0" lang="en-IN" sz="3200" spc="-1" strike="noStrike">
-              <a:solidFill>
-                <a:srgbClr val="000000"/>
-              </a:solidFill>
-              <a:latin typeface="Calibri"/>
+              <a:latin typeface="Arial"/>
             </a:endParaRPr>
           </a:p>
         </p:txBody>
@@ -2107,11 +2098,11 @@
             <a:noAutofit/>
           </a:bodyPr>
           <a:p>
-            <a:endParaRPr b="0" lang="en-IN" sz="1800" spc="-1" strike="noStrike">
-              <a:solidFill>
-                <a:srgbClr val="000000"/>
-              </a:solidFill>
-              <a:latin typeface="Calibri"/>
+            <a:pPr algn="ctr">
+              <a:buNone/>
+            </a:pPr>
+            <a:endParaRPr b="0" lang="en-IN" sz="4400" spc="-1" strike="noStrike">
+              <a:latin typeface="Arial"/>
             </a:endParaRPr>
           </a:p>
         </p:txBody>
@@ -2145,10 +2136,7 @@
           </a:bodyPr>
           <a:p>
             <a:endParaRPr b="0" lang="en-IN" sz="3200" spc="-1" strike="noStrike">
-              <a:solidFill>
-                <a:srgbClr val="000000"/>
-              </a:solidFill>
-              <a:latin typeface="Calibri"/>
+              <a:latin typeface="Arial"/>
             </a:endParaRPr>
           </a:p>
         </p:txBody>
@@ -2182,10 +2170,7 @@
           </a:bodyPr>
           <a:p>
             <a:endParaRPr b="0" lang="en-IN" sz="3200" spc="-1" strike="noStrike">
-              <a:solidFill>
-                <a:srgbClr val="000000"/>
-              </a:solidFill>
-              <a:latin typeface="Calibri"/>
+              <a:latin typeface="Arial"/>
             </a:endParaRPr>
           </a:p>
         </p:txBody>
@@ -2219,10 +2204,7 @@
           </a:bodyPr>
           <a:p>
             <a:endParaRPr b="0" lang="en-IN" sz="3200" spc="-1" strike="noStrike">
-              <a:solidFill>
-                <a:srgbClr val="000000"/>
-              </a:solidFill>
-              <a:latin typeface="Calibri"/>
+              <a:latin typeface="Arial"/>
             </a:endParaRPr>
           </a:p>
         </p:txBody>
@@ -2256,10 +2238,7 @@
           </a:bodyPr>
           <a:p>
             <a:endParaRPr b="0" lang="en-IN" sz="3200" spc="-1" strike="noStrike">
-              <a:solidFill>
-                <a:srgbClr val="000000"/>
-              </a:solidFill>
-              <a:latin typeface="Calibri"/>
+              <a:latin typeface="Arial"/>
             </a:endParaRPr>
           </a:p>
         </p:txBody>
@@ -2314,11 +2293,11 @@
             <a:noAutofit/>
           </a:bodyPr>
           <a:p>
-            <a:endParaRPr b="0" lang="en-IN" sz="1800" spc="-1" strike="noStrike">
-              <a:solidFill>
-                <a:srgbClr val="000000"/>
-              </a:solidFill>
-              <a:latin typeface="Calibri"/>
+            <a:pPr algn="ctr">
+              <a:buNone/>
+            </a:pPr>
+            <a:endParaRPr b="0" lang="en-IN" sz="4400" spc="-1" strike="noStrike">
+              <a:latin typeface="Arial"/>
             </a:endParaRPr>
           </a:p>
         </p:txBody>
@@ -2352,10 +2331,7 @@
           </a:bodyPr>
           <a:p>
             <a:endParaRPr b="0" lang="en-IN" sz="3200" spc="-1" strike="noStrike">
-              <a:solidFill>
-                <a:srgbClr val="000000"/>
-              </a:solidFill>
-              <a:latin typeface="Calibri"/>
+              <a:latin typeface="Arial"/>
             </a:endParaRPr>
           </a:p>
         </p:txBody>
@@ -2389,10 +2365,7 @@
           </a:bodyPr>
           <a:p>
             <a:endParaRPr b="0" lang="en-IN" sz="3200" spc="-1" strike="noStrike">
-              <a:solidFill>
-                <a:srgbClr val="000000"/>
-              </a:solidFill>
-              <a:latin typeface="Calibri"/>
+              <a:latin typeface="Arial"/>
             </a:endParaRPr>
           </a:p>
         </p:txBody>
@@ -2426,10 +2399,7 @@
           </a:bodyPr>
           <a:p>
             <a:endParaRPr b="0" lang="en-IN" sz="3200" spc="-1" strike="noStrike">
-              <a:solidFill>
-                <a:srgbClr val="000000"/>
-              </a:solidFill>
-              <a:latin typeface="Calibri"/>
+              <a:latin typeface="Arial"/>
             </a:endParaRPr>
           </a:p>
         </p:txBody>
@@ -2463,10 +2433,7 @@
           </a:bodyPr>
           <a:p>
             <a:endParaRPr b="0" lang="en-IN" sz="3200" spc="-1" strike="noStrike">
-              <a:solidFill>
-                <a:srgbClr val="000000"/>
-              </a:solidFill>
-              <a:latin typeface="Calibri"/>
+              <a:latin typeface="Arial"/>
             </a:endParaRPr>
           </a:p>
         </p:txBody>
@@ -2500,10 +2467,7 @@
           </a:bodyPr>
           <a:p>
             <a:endParaRPr b="0" lang="en-IN" sz="3200" spc="-1" strike="noStrike">
-              <a:solidFill>
-                <a:srgbClr val="000000"/>
-              </a:solidFill>
-              <a:latin typeface="Calibri"/>
+              <a:latin typeface="Arial"/>
             </a:endParaRPr>
           </a:p>
         </p:txBody>
@@ -2537,10 +2501,7 @@
           </a:bodyPr>
           <a:p>
             <a:endParaRPr b="0" lang="en-IN" sz="3200" spc="-1" strike="noStrike">
-              <a:solidFill>
-                <a:srgbClr val="000000"/>
-              </a:solidFill>
-              <a:latin typeface="Calibri"/>
+              <a:latin typeface="Arial"/>
             </a:endParaRPr>
           </a:p>
         </p:txBody>
@@ -2595,11 +2556,11 @@
             <a:noAutofit/>
           </a:bodyPr>
           <a:p>
-            <a:endParaRPr b="0" lang="en-IN" sz="1800" spc="-1" strike="noStrike">
-              <a:solidFill>
-                <a:srgbClr val="000000"/>
-              </a:solidFill>
-              <a:latin typeface="Calibri"/>
+            <a:pPr algn="ctr">
+              <a:buNone/>
+            </a:pPr>
+            <a:endParaRPr b="0" lang="en-IN" sz="4400" spc="-1" strike="noStrike">
+              <a:latin typeface="Arial"/>
             </a:endParaRPr>
           </a:p>
         </p:txBody>
@@ -2691,11 +2652,11 @@
             <a:noAutofit/>
           </a:bodyPr>
           <a:p>
-            <a:endParaRPr b="0" lang="en-IN" sz="1800" spc="-1" strike="noStrike">
-              <a:solidFill>
-                <a:srgbClr val="000000"/>
-              </a:solidFill>
-              <a:latin typeface="Calibri"/>
+            <a:pPr algn="ctr">
+              <a:buNone/>
+            </a:pPr>
+            <a:endParaRPr b="0" lang="en-IN" sz="4400" spc="-1" strike="noStrike">
+              <a:latin typeface="Arial"/>
             </a:endParaRPr>
           </a:p>
         </p:txBody>
@@ -2729,10 +2690,7 @@
           </a:bodyPr>
           <a:p>
             <a:endParaRPr b="0" lang="en-IN" sz="3200" spc="-1" strike="noStrike">
-              <a:solidFill>
-                <a:srgbClr val="000000"/>
-              </a:solidFill>
-              <a:latin typeface="Calibri"/>
+              <a:latin typeface="Arial"/>
             </a:endParaRPr>
           </a:p>
         </p:txBody>
@@ -2787,11 +2745,11 @@
             <a:noAutofit/>
           </a:bodyPr>
           <a:p>
-            <a:endParaRPr b="0" lang="en-IN" sz="1800" spc="-1" strike="noStrike">
-              <a:solidFill>
-                <a:srgbClr val="000000"/>
-              </a:solidFill>
-              <a:latin typeface="Calibri"/>
+            <a:pPr algn="ctr">
+              <a:buNone/>
+            </a:pPr>
+            <a:endParaRPr b="0" lang="en-IN" sz="4400" spc="-1" strike="noStrike">
+              <a:latin typeface="Arial"/>
             </a:endParaRPr>
           </a:p>
         </p:txBody>
@@ -2825,10 +2783,7 @@
           </a:bodyPr>
           <a:p>
             <a:endParaRPr b="0" lang="en-IN" sz="3200" spc="-1" strike="noStrike">
-              <a:solidFill>
-                <a:srgbClr val="000000"/>
-              </a:solidFill>
-              <a:latin typeface="Calibri"/>
+              <a:latin typeface="Arial"/>
             </a:endParaRPr>
           </a:p>
         </p:txBody>
@@ -2862,10 +2817,7 @@
           </a:bodyPr>
           <a:p>
             <a:endParaRPr b="0" lang="en-IN" sz="3200" spc="-1" strike="noStrike">
-              <a:solidFill>
-                <a:srgbClr val="000000"/>
-              </a:solidFill>
-              <a:latin typeface="Calibri"/>
+              <a:latin typeface="Arial"/>
             </a:endParaRPr>
           </a:p>
         </p:txBody>
@@ -2920,11 +2872,11 @@
             <a:noAutofit/>
           </a:bodyPr>
           <a:p>
-            <a:endParaRPr b="0" lang="en-IN" sz="1800" spc="-1" strike="noStrike">
-              <a:solidFill>
-                <a:srgbClr val="000000"/>
-              </a:solidFill>
-              <a:latin typeface="Calibri"/>
+            <a:pPr algn="ctr">
+              <a:buNone/>
+            </a:pPr>
+            <a:endParaRPr b="0" lang="en-IN" sz="4400" spc="-1" strike="noStrike">
+              <a:latin typeface="Arial"/>
             </a:endParaRPr>
           </a:p>
         </p:txBody>
@@ -3038,11 +2990,11 @@
             <a:noAutofit/>
           </a:bodyPr>
           <a:p>
-            <a:endParaRPr b="0" lang="en-IN" sz="1800" spc="-1" strike="noStrike">
-              <a:solidFill>
-                <a:srgbClr val="000000"/>
-              </a:solidFill>
-              <a:latin typeface="Calibri"/>
+            <a:pPr algn="ctr">
+              <a:buNone/>
+            </a:pPr>
+            <a:endParaRPr b="0" lang="en-IN" sz="4400" spc="-1" strike="noStrike">
+              <a:latin typeface="Arial"/>
             </a:endParaRPr>
           </a:p>
         </p:txBody>
@@ -3076,10 +3028,7 @@
           </a:bodyPr>
           <a:p>
             <a:endParaRPr b="0" lang="en-IN" sz="3200" spc="-1" strike="noStrike">
-              <a:solidFill>
-                <a:srgbClr val="000000"/>
-              </a:solidFill>
-              <a:latin typeface="Calibri"/>
+              <a:latin typeface="Arial"/>
             </a:endParaRPr>
           </a:p>
         </p:txBody>
@@ -3113,10 +3062,7 @@
           </a:bodyPr>
           <a:p>
             <a:endParaRPr b="0" lang="en-IN" sz="3200" spc="-1" strike="noStrike">
-              <a:solidFill>
-                <a:srgbClr val="000000"/>
-              </a:solidFill>
-              <a:latin typeface="Calibri"/>
+              <a:latin typeface="Arial"/>
             </a:endParaRPr>
           </a:p>
         </p:txBody>
@@ -3150,10 +3096,7 @@
           </a:bodyPr>
           <a:p>
             <a:endParaRPr b="0" lang="en-IN" sz="3200" spc="-1" strike="noStrike">
-              <a:solidFill>
-                <a:srgbClr val="000000"/>
-              </a:solidFill>
-              <a:latin typeface="Calibri"/>
+              <a:latin typeface="Arial"/>
             </a:endParaRPr>
           </a:p>
         </p:txBody>
@@ -3208,11 +3151,11 @@
             <a:noAutofit/>
           </a:bodyPr>
           <a:p>
-            <a:endParaRPr b="0" lang="en-IN" sz="1800" spc="-1" strike="noStrike">
-              <a:solidFill>
-                <a:srgbClr val="000000"/>
-              </a:solidFill>
-              <a:latin typeface="Calibri"/>
+            <a:pPr algn="ctr">
+              <a:buNone/>
+            </a:pPr>
+            <a:endParaRPr b="0" lang="en-IN" sz="4400" spc="-1" strike="noStrike">
+              <a:latin typeface="Arial"/>
             </a:endParaRPr>
           </a:p>
         </p:txBody>
@@ -3246,10 +3189,7 @@
           </a:bodyPr>
           <a:p>
             <a:endParaRPr b="0" lang="en-IN" sz="3200" spc="-1" strike="noStrike">
-              <a:solidFill>
-                <a:srgbClr val="000000"/>
-              </a:solidFill>
-              <a:latin typeface="Calibri"/>
+              <a:latin typeface="Arial"/>
             </a:endParaRPr>
           </a:p>
         </p:txBody>
@@ -3283,10 +3223,7 @@
           </a:bodyPr>
           <a:p>
             <a:endParaRPr b="0" lang="en-IN" sz="3200" spc="-1" strike="noStrike">
-              <a:solidFill>
-                <a:srgbClr val="000000"/>
-              </a:solidFill>
-              <a:latin typeface="Calibri"/>
+              <a:latin typeface="Arial"/>
             </a:endParaRPr>
           </a:p>
         </p:txBody>
@@ -3320,10 +3257,7 @@
           </a:bodyPr>
           <a:p>
             <a:endParaRPr b="0" lang="en-IN" sz="3200" spc="-1" strike="noStrike">
-              <a:solidFill>
-                <a:srgbClr val="000000"/>
-              </a:solidFill>
-              <a:latin typeface="Calibri"/>
+              <a:latin typeface="Arial"/>
             </a:endParaRPr>
           </a:p>
         </p:txBody>
@@ -3378,11 +3312,11 @@
             <a:noAutofit/>
           </a:bodyPr>
           <a:p>
-            <a:endParaRPr b="0" lang="en-IN" sz="1800" spc="-1" strike="noStrike">
-              <a:solidFill>
-                <a:srgbClr val="000000"/>
-              </a:solidFill>
-              <a:latin typeface="Calibri"/>
+            <a:pPr algn="ctr">
+              <a:buNone/>
+            </a:pPr>
+            <a:endParaRPr b="0" lang="en-IN" sz="4400" spc="-1" strike="noStrike">
+              <a:latin typeface="Arial"/>
             </a:endParaRPr>
           </a:p>
         </p:txBody>
@@ -3416,10 +3350,7 @@
           </a:bodyPr>
           <a:p>
             <a:endParaRPr b="0" lang="en-IN" sz="3200" spc="-1" strike="noStrike">
-              <a:solidFill>
-                <a:srgbClr val="000000"/>
-              </a:solidFill>
-              <a:latin typeface="Calibri"/>
+              <a:latin typeface="Arial"/>
             </a:endParaRPr>
           </a:p>
         </p:txBody>
@@ -3453,10 +3384,7 @@
           </a:bodyPr>
           <a:p>
             <a:endParaRPr b="0" lang="en-IN" sz="3200" spc="-1" strike="noStrike">
-              <a:solidFill>
-                <a:srgbClr val="000000"/>
-              </a:solidFill>
-              <a:latin typeface="Calibri"/>
+              <a:latin typeface="Arial"/>
             </a:endParaRPr>
           </a:p>
         </p:txBody>
@@ -3490,10 +3418,7 @@
           </a:bodyPr>
           <a:p>
             <a:endParaRPr b="0" lang="en-IN" sz="3200" spc="-1" strike="noStrike">
-              <a:solidFill>
-                <a:srgbClr val="000000"/>
-              </a:solidFill>
-              <a:latin typeface="Calibri"/>
+              <a:latin typeface="Arial"/>
             </a:endParaRPr>
           </a:p>
         </p:txBody>
@@ -3555,164 +3480,17 @@
             <a:noAutofit/>
           </a:bodyPr>
           <a:p>
-            <a:r>
-              <a:rPr b="0" lang="en-IN" sz="1800" spc="-1" strike="noStrike">
-                <a:solidFill>
-                  <a:srgbClr val="000000"/>
-                </a:solidFill>
-                <a:latin typeface="Calibri"/>
-              </a:rPr>
-              <a:t>Cl</a:t>
-            </a:r>
-            <a:r>
-              <a:rPr b="0" lang="en-IN" sz="1800" spc="-1" strike="noStrike">
-                <a:solidFill>
-                  <a:srgbClr val="000000"/>
-                </a:solidFill>
-                <a:latin typeface="Calibri"/>
-              </a:rPr>
-              <a:t>ic</a:t>
-            </a:r>
-            <a:r>
-              <a:rPr b="0" lang="en-IN" sz="1800" spc="-1" strike="noStrike">
-                <a:solidFill>
-                  <a:srgbClr val="000000"/>
-                </a:solidFill>
-                <a:latin typeface="Calibri"/>
-              </a:rPr>
-              <a:t>k </a:t>
-            </a:r>
-            <a:r>
-              <a:rPr b="0" lang="en-IN" sz="1800" spc="-1" strike="noStrike">
-                <a:solidFill>
-                  <a:srgbClr val="000000"/>
-                </a:solidFill>
-                <a:latin typeface="Calibri"/>
-              </a:rPr>
-              <a:t>to </a:t>
-            </a:r>
-            <a:r>
-              <a:rPr b="0" lang="en-IN" sz="1800" spc="-1" strike="noStrike">
-                <a:solidFill>
-                  <a:srgbClr val="000000"/>
-                </a:solidFill>
-                <a:latin typeface="Calibri"/>
-              </a:rPr>
-              <a:t>e</a:t>
-            </a:r>
-            <a:r>
-              <a:rPr b="0" lang="en-IN" sz="1800" spc="-1" strike="noStrike">
-                <a:solidFill>
-                  <a:srgbClr val="000000"/>
-                </a:solidFill>
-                <a:latin typeface="Calibri"/>
-              </a:rPr>
-              <a:t>di</a:t>
-            </a:r>
-            <a:r>
-              <a:rPr b="0" lang="en-IN" sz="1800" spc="-1" strike="noStrike">
-                <a:solidFill>
-                  <a:srgbClr val="000000"/>
-                </a:solidFill>
-                <a:latin typeface="Calibri"/>
-              </a:rPr>
-              <a:t>t </a:t>
-            </a:r>
-            <a:r>
-              <a:rPr b="0" lang="en-IN" sz="1800" spc="-1" strike="noStrike">
-                <a:solidFill>
-                  <a:srgbClr val="000000"/>
-                </a:solidFill>
-                <a:latin typeface="Calibri"/>
-              </a:rPr>
-              <a:t>th</a:t>
-            </a:r>
-            <a:r>
-              <a:rPr b="0" lang="en-IN" sz="1800" spc="-1" strike="noStrike">
-                <a:solidFill>
-                  <a:srgbClr val="000000"/>
-                </a:solidFill>
-                <a:latin typeface="Calibri"/>
-              </a:rPr>
-              <a:t>e </a:t>
-            </a:r>
-            <a:r>
-              <a:rPr b="0" lang="en-IN" sz="1800" spc="-1" strike="noStrike">
-                <a:solidFill>
-                  <a:srgbClr val="000000"/>
-                </a:solidFill>
-                <a:latin typeface="Calibri"/>
-              </a:rPr>
-              <a:t>tit</a:t>
-            </a:r>
-            <a:r>
-              <a:rPr b="0" lang="en-IN" sz="1800" spc="-1" strike="noStrike">
-                <a:solidFill>
-                  <a:srgbClr val="000000"/>
-                </a:solidFill>
-                <a:latin typeface="Calibri"/>
-              </a:rPr>
-              <a:t>le </a:t>
-            </a:r>
-            <a:r>
-              <a:rPr b="0" lang="en-IN" sz="1800" spc="-1" strike="noStrike">
-                <a:solidFill>
-                  <a:srgbClr val="000000"/>
-                </a:solidFill>
-                <a:latin typeface="Calibri"/>
-              </a:rPr>
-              <a:t>te</a:t>
-            </a:r>
-            <a:r>
-              <a:rPr b="0" lang="en-IN" sz="1800" spc="-1" strike="noStrike">
-                <a:solidFill>
-                  <a:srgbClr val="000000"/>
-                </a:solidFill>
-                <a:latin typeface="Calibri"/>
-              </a:rPr>
-              <a:t>xt </a:t>
-            </a:r>
-            <a:r>
-              <a:rPr b="0" lang="en-IN" sz="1800" spc="-1" strike="noStrike">
-                <a:solidFill>
-                  <a:srgbClr val="000000"/>
-                </a:solidFill>
-                <a:latin typeface="Calibri"/>
-              </a:rPr>
-              <a:t>fo</a:t>
-            </a:r>
-            <a:r>
-              <a:rPr b="0" lang="en-IN" sz="1800" spc="-1" strike="noStrike">
-                <a:solidFill>
-                  <a:srgbClr val="000000"/>
-                </a:solidFill>
-                <a:latin typeface="Calibri"/>
-              </a:rPr>
-              <a:t>r</a:t>
-            </a:r>
-            <a:r>
-              <a:rPr b="0" lang="en-IN" sz="1800" spc="-1" strike="noStrike">
-                <a:solidFill>
-                  <a:srgbClr val="000000"/>
-                </a:solidFill>
-                <a:latin typeface="Calibri"/>
-              </a:rPr>
-              <a:t>m</a:t>
-            </a:r>
-            <a:r>
-              <a:rPr b="0" lang="en-IN" sz="1800" spc="-1" strike="noStrike">
-                <a:solidFill>
-                  <a:srgbClr val="000000"/>
-                </a:solidFill>
-                <a:latin typeface="Calibri"/>
-              </a:rPr>
-              <a:t>at</a:t>
-            </a:r>
-            <a:endParaRPr b="0" lang="en-IN" sz="1800" spc="-1" strike="noStrike">
-              <a:solidFill>
-                <a:srgbClr val="000000"/>
-              </a:solidFill>
-              <a:latin typeface="Calibri"/>
+            <a:pPr algn="ctr">
+              <a:buNone/>
+            </a:pPr>
+            <a:r>
+              <a:rPr b="0" lang="en-IN" sz="4400" spc="-1" strike="noStrike">
+                <a:latin typeface="Arial"/>
+              </a:rPr>
+              <a:t>Click to edit the title text format</a:t>
+            </a:r>
+            <a:endParaRPr b="0" lang="en-IN" sz="4400" spc="-1" strike="noStrike">
+              <a:latin typeface="Arial"/>
             </a:endParaRPr>
           </a:p>
         </p:txBody>
@@ -3758,18 +3536,12 @@
             </a:pPr>
             <a:r>
               <a:rPr b="0" lang="en-IN" sz="3200" spc="-1" strike="noStrike">
-                <a:solidFill>
-                  <a:srgbClr val="000000"/>
-                </a:solidFill>
-                <a:latin typeface="Calibri"/>
+                <a:latin typeface="Arial"/>
               </a:rPr>
               <a:t>Click to edit the outline text format</a:t>
             </a:r>
             <a:endParaRPr b="0" lang="en-IN" sz="3200" spc="-1" strike="noStrike">
-              <a:solidFill>
-                <a:srgbClr val="000000"/>
-              </a:solidFill>
-              <a:latin typeface="Calibri"/>
+              <a:latin typeface="Arial"/>
             </a:endParaRPr>
           </a:p>
           <a:p>
@@ -3785,19 +3557,13 @@
               <a:buChar char=""/>
             </a:pPr>
             <a:r>
-              <a:rPr b="0" lang="en-IN" sz="2400" spc="-1" strike="noStrike">
-                <a:solidFill>
-                  <a:srgbClr val="000000"/>
-                </a:solidFill>
-                <a:latin typeface="Calibri"/>
+              <a:rPr b="0" lang="en-IN" sz="2800" spc="-1" strike="noStrike">
+                <a:latin typeface="Arial"/>
               </a:rPr>
               <a:t>Second Outline Level</a:t>
             </a:r>
-            <a:endParaRPr b="0" lang="en-IN" sz="2400" spc="-1" strike="noStrike">
-              <a:solidFill>
-                <a:srgbClr val="000000"/>
-              </a:solidFill>
-              <a:latin typeface="Calibri"/>
+            <a:endParaRPr b="0" lang="en-IN" sz="2800" spc="-1" strike="noStrike">
+              <a:latin typeface="Arial"/>
             </a:endParaRPr>
           </a:p>
           <a:p>
@@ -3813,19 +3579,13 @@
               <a:buChar char=""/>
             </a:pPr>
             <a:r>
-              <a:rPr b="0" lang="en-IN" sz="2000" spc="-1" strike="noStrike">
-                <a:solidFill>
-                  <a:srgbClr val="000000"/>
-                </a:solidFill>
-                <a:latin typeface="Calibri"/>
+              <a:rPr b="0" lang="en-IN" sz="2400" spc="-1" strike="noStrike">
+                <a:latin typeface="Arial"/>
               </a:rPr>
               <a:t>Third Outline Level</a:t>
             </a:r>
-            <a:endParaRPr b="0" lang="en-IN" sz="2000" spc="-1" strike="noStrike">
-              <a:solidFill>
-                <a:srgbClr val="000000"/>
-              </a:solidFill>
-              <a:latin typeface="Calibri"/>
+            <a:endParaRPr b="0" lang="en-IN" sz="2400" spc="-1" strike="noStrike">
+              <a:latin typeface="Arial"/>
             </a:endParaRPr>
           </a:p>
           <a:p>
@@ -3842,18 +3602,12 @@
             </a:pPr>
             <a:r>
               <a:rPr b="0" lang="en-IN" sz="2000" spc="-1" strike="noStrike">
-                <a:solidFill>
-                  <a:srgbClr val="000000"/>
-                </a:solidFill>
-                <a:latin typeface="Calibri"/>
+                <a:latin typeface="Arial"/>
               </a:rPr>
               <a:t>Fourth Outline Level</a:t>
             </a:r>
             <a:endParaRPr b="0" lang="en-IN" sz="2000" spc="-1" strike="noStrike">
-              <a:solidFill>
-                <a:srgbClr val="000000"/>
-              </a:solidFill>
-              <a:latin typeface="Calibri"/>
+              <a:latin typeface="Arial"/>
             </a:endParaRPr>
           </a:p>
           <a:p>
@@ -3870,18 +3624,12 @@
             </a:pPr>
             <a:r>
               <a:rPr b="0" lang="en-IN" sz="2000" spc="-1" strike="noStrike">
-                <a:solidFill>
-                  <a:srgbClr val="000000"/>
-                </a:solidFill>
-                <a:latin typeface="Calibri"/>
+                <a:latin typeface="Arial"/>
               </a:rPr>
               <a:t>Fifth Outline Level</a:t>
             </a:r>
             <a:endParaRPr b="0" lang="en-IN" sz="2000" spc="-1" strike="noStrike">
-              <a:solidFill>
-                <a:srgbClr val="000000"/>
-              </a:solidFill>
-              <a:latin typeface="Calibri"/>
+              <a:latin typeface="Arial"/>
             </a:endParaRPr>
           </a:p>
           <a:p>
@@ -3898,18 +3646,12 @@
             </a:pPr>
             <a:r>
               <a:rPr b="0" lang="en-IN" sz="2000" spc="-1" strike="noStrike">
-                <a:solidFill>
-                  <a:srgbClr val="000000"/>
-                </a:solidFill>
-                <a:latin typeface="Calibri"/>
+                <a:latin typeface="Arial"/>
               </a:rPr>
               <a:t>Sixth Outline Level</a:t>
             </a:r>
             <a:endParaRPr b="0" lang="en-IN" sz="2000" spc="-1" strike="noStrike">
-              <a:solidFill>
-                <a:srgbClr val="000000"/>
-              </a:solidFill>
-              <a:latin typeface="Calibri"/>
+              <a:latin typeface="Arial"/>
             </a:endParaRPr>
           </a:p>
           <a:p>
@@ -3926,18 +3668,12 @@
             </a:pPr>
             <a:r>
               <a:rPr b="0" lang="en-IN" sz="2000" spc="-1" strike="noStrike">
-                <a:solidFill>
-                  <a:srgbClr val="000000"/>
-                </a:solidFill>
-                <a:latin typeface="Calibri"/>
+                <a:latin typeface="Arial"/>
               </a:rPr>
               <a:t>Seventh Outline Level</a:t>
             </a:r>
             <a:endParaRPr b="0" lang="en-IN" sz="2000" spc="-1" strike="noStrike">
-              <a:solidFill>
-                <a:srgbClr val="000000"/>
-              </a:solidFill>
-              <a:latin typeface="Calibri"/>
+              <a:latin typeface="Arial"/>
             </a:endParaRPr>
           </a:p>
         </p:txBody>
@@ -3995,7 +3731,7 @@
         <p:spPr>
           <a:xfrm>
             <a:off x="0" y="0"/>
-            <a:ext cx="164160" cy="5143320"/>
+            <a:ext cx="163800" cy="5142960"/>
           </a:xfrm>
           <a:prstGeom prst="rect">
             <a:avLst/>
@@ -4023,7 +3759,7 @@
         <p:spPr>
           <a:xfrm>
             <a:off x="7132320" y="-1097280"/>
-            <a:ext cx="3474360" cy="3474360"/>
+            <a:ext cx="3474000" cy="3474000"/>
           </a:xfrm>
           <a:prstGeom prst="ellipse">
             <a:avLst/>
@@ -4051,7 +3787,7 @@
         <p:spPr>
           <a:xfrm>
             <a:off x="7498080" y="-822960"/>
-            <a:ext cx="2742840" cy="2742840"/>
+            <a:ext cx="2742480" cy="2742480"/>
           </a:xfrm>
           <a:prstGeom prst="ellipse">
             <a:avLst/>
@@ -4081,7 +3817,7 @@
         <p:spPr>
           <a:xfrm>
             <a:off x="0" y="4754880"/>
-            <a:ext cx="9143640" cy="383760"/>
+            <a:ext cx="9143280" cy="383400"/>
           </a:xfrm>
           <a:prstGeom prst="rect">
             <a:avLst/>
@@ -4109,7 +3845,7 @@
         <p:spPr>
           <a:xfrm>
             <a:off x="164520" y="4754880"/>
-            <a:ext cx="3200040" cy="383760"/>
+            <a:ext cx="3199680" cy="383400"/>
           </a:xfrm>
           <a:prstGeom prst="rect">
             <a:avLst/>
@@ -4141,7 +3877,7 @@
         <p:spPr>
           <a:xfrm>
             <a:off x="502920" y="1005840"/>
-            <a:ext cx="639720" cy="639720"/>
+            <a:ext cx="639360" cy="639360"/>
           </a:xfrm>
           <a:prstGeom prst="rect">
             <a:avLst/>
@@ -4160,7 +3896,7 @@
         <p:spPr>
           <a:xfrm>
             <a:off x="365760" y="1737360"/>
-            <a:ext cx="8412120" cy="822600"/>
+            <a:ext cx="8411760" cy="822240"/>
           </a:xfrm>
           <a:prstGeom prst="rect">
             <a:avLst/>
@@ -4215,7 +3951,7 @@
         <p:spPr>
           <a:xfrm>
             <a:off x="365760" y="2514600"/>
-            <a:ext cx="8412120" cy="685440"/>
+            <a:ext cx="8411760" cy="685080"/>
           </a:xfrm>
           <a:prstGeom prst="rect">
             <a:avLst/>
@@ -4270,7 +4006,7 @@
         <p:spPr>
           <a:xfrm>
             <a:off x="365760" y="3337560"/>
-            <a:ext cx="4205880" cy="402120"/>
+            <a:ext cx="4205520" cy="401760"/>
           </a:xfrm>
           <a:prstGeom prst="rect">
             <a:avLst/>
@@ -4298,7 +4034,7 @@
         <p:spPr>
           <a:xfrm>
             <a:off x="365760" y="3337560"/>
-            <a:ext cx="4205880" cy="402120"/>
+            <a:ext cx="4205520" cy="401760"/>
           </a:xfrm>
           <a:prstGeom prst="rect">
             <a:avLst/>
@@ -4353,7 +4089,7 @@
         <p:spPr>
           <a:xfrm>
             <a:off x="365760" y="4773240"/>
-            <a:ext cx="4571640" cy="347040"/>
+            <a:ext cx="4571280" cy="346680"/>
           </a:xfrm>
           <a:prstGeom prst="rect">
             <a:avLst/>
@@ -4445,7 +4181,7 @@
         <p:spPr>
           <a:xfrm>
             <a:off x="0" y="0"/>
-            <a:ext cx="9143640" cy="959760"/>
+            <a:ext cx="9143280" cy="959400"/>
           </a:xfrm>
           <a:prstGeom prst="rect">
             <a:avLst/>
@@ -4473,7 +4209,7 @@
         <p:spPr>
           <a:xfrm>
             <a:off x="0" y="960120"/>
-            <a:ext cx="9143640" cy="54360"/>
+            <a:ext cx="9143280" cy="54000"/>
           </a:xfrm>
           <a:prstGeom prst="rect">
             <a:avLst/>
@@ -4505,7 +4241,7 @@
         <p:spPr>
           <a:xfrm>
             <a:off x="320040" y="182880"/>
-            <a:ext cx="548280" cy="548280"/>
+            <a:ext cx="547920" cy="547920"/>
           </a:xfrm>
           <a:prstGeom prst="rect">
             <a:avLst/>
@@ -4524,7 +4260,7 @@
         <p:spPr>
           <a:xfrm>
             <a:off x="1005840" y="182880"/>
-            <a:ext cx="7772040" cy="594000"/>
+            <a:ext cx="7771680" cy="593640"/>
           </a:xfrm>
           <a:prstGeom prst="rect">
             <a:avLst/>
@@ -4579,7 +4315,7 @@
         <p:spPr>
           <a:xfrm>
             <a:off x="320040" y="1115640"/>
-            <a:ext cx="8503560" cy="603000"/>
+            <a:ext cx="8503200" cy="602640"/>
           </a:xfrm>
           <a:prstGeom prst="rect">
             <a:avLst/>
@@ -4614,7 +4350,7 @@
         <p:spPr>
           <a:xfrm>
             <a:off x="320040" y="1115640"/>
-            <a:ext cx="54360" cy="603000"/>
+            <a:ext cx="54000" cy="602640"/>
           </a:xfrm>
           <a:prstGeom prst="rect">
             <a:avLst/>
@@ -4646,7 +4382,7 @@
         <p:spPr>
           <a:xfrm>
             <a:off x="475560" y="1298520"/>
-            <a:ext cx="237240" cy="237240"/>
+            <a:ext cx="236880" cy="236880"/>
           </a:xfrm>
           <a:prstGeom prst="rect">
             <a:avLst/>
@@ -4665,7 +4401,7 @@
         <p:spPr>
           <a:xfrm>
             <a:off x="786240" y="1207080"/>
-            <a:ext cx="2285640" cy="273960"/>
+            <a:ext cx="2285280" cy="273600"/>
           </a:xfrm>
           <a:prstGeom prst="rect">
             <a:avLst/>
@@ -4720,7 +4456,7 @@
         <p:spPr>
           <a:xfrm>
             <a:off x="786240" y="1463040"/>
-            <a:ext cx="7954920" cy="219240"/>
+            <a:ext cx="7954560" cy="218880"/>
           </a:xfrm>
           <a:prstGeom prst="rect">
             <a:avLst/>
@@ -4775,7 +4511,7 @@
         <p:spPr>
           <a:xfrm>
             <a:off x="320040" y="1792080"/>
-            <a:ext cx="8503560" cy="603000"/>
+            <a:ext cx="8503200" cy="602640"/>
           </a:xfrm>
           <a:prstGeom prst="rect">
             <a:avLst/>
@@ -4810,7 +4546,7 @@
         <p:spPr>
           <a:xfrm>
             <a:off x="320040" y="1792080"/>
-            <a:ext cx="54360" cy="603000"/>
+            <a:ext cx="54000" cy="602640"/>
           </a:xfrm>
           <a:prstGeom prst="rect">
             <a:avLst/>
@@ -4842,7 +4578,7 @@
         <p:spPr>
           <a:xfrm>
             <a:off x="475560" y="1974960"/>
-            <a:ext cx="237240" cy="237240"/>
+            <a:ext cx="236880" cy="236880"/>
           </a:xfrm>
           <a:prstGeom prst="rect">
             <a:avLst/>
@@ -4861,7 +4597,7 @@
         <p:spPr>
           <a:xfrm>
             <a:off x="786240" y="1883520"/>
-            <a:ext cx="2285640" cy="273960"/>
+            <a:ext cx="2285280" cy="273600"/>
           </a:xfrm>
           <a:prstGeom prst="rect">
             <a:avLst/>
@@ -4916,7 +4652,7 @@
         <p:spPr>
           <a:xfrm>
             <a:off x="786240" y="2139840"/>
-            <a:ext cx="7954920" cy="219240"/>
+            <a:ext cx="7954560" cy="218880"/>
           </a:xfrm>
           <a:prstGeom prst="rect">
             <a:avLst/>
@@ -4971,7 +4707,7 @@
         <p:spPr>
           <a:xfrm>
             <a:off x="320040" y="2468880"/>
-            <a:ext cx="8503560" cy="603000"/>
+            <a:ext cx="8503200" cy="602640"/>
           </a:xfrm>
           <a:prstGeom prst="rect">
             <a:avLst/>
@@ -5006,7 +4742,7 @@
         <p:spPr>
           <a:xfrm>
             <a:off x="320040" y="2468880"/>
-            <a:ext cx="54360" cy="603000"/>
+            <a:ext cx="54000" cy="602640"/>
           </a:xfrm>
           <a:prstGeom prst="rect">
             <a:avLst/>
@@ -5038,7 +4774,7 @@
         <p:spPr>
           <a:xfrm>
             <a:off x="475560" y="2651760"/>
-            <a:ext cx="237240" cy="237240"/>
+            <a:ext cx="236880" cy="236880"/>
           </a:xfrm>
           <a:prstGeom prst="rect">
             <a:avLst/>
@@ -5057,7 +4793,7 @@
         <p:spPr>
           <a:xfrm>
             <a:off x="786240" y="2560320"/>
-            <a:ext cx="2285640" cy="273960"/>
+            <a:ext cx="2285280" cy="273600"/>
           </a:xfrm>
           <a:prstGeom prst="rect">
             <a:avLst/>
@@ -5112,7 +4848,7 @@
         <p:spPr>
           <a:xfrm>
             <a:off x="786240" y="2816280"/>
-            <a:ext cx="7954920" cy="219240"/>
+            <a:ext cx="7954560" cy="218880"/>
           </a:xfrm>
           <a:prstGeom prst="rect">
             <a:avLst/>
@@ -5167,7 +4903,7 @@
         <p:spPr>
           <a:xfrm>
             <a:off x="320040" y="3145680"/>
-            <a:ext cx="8503560" cy="603000"/>
+            <a:ext cx="8503200" cy="602640"/>
           </a:xfrm>
           <a:prstGeom prst="rect">
             <a:avLst/>
@@ -5202,7 +4938,7 @@
         <p:spPr>
           <a:xfrm>
             <a:off x="320040" y="3145680"/>
-            <a:ext cx="54360" cy="603000"/>
+            <a:ext cx="54000" cy="602640"/>
           </a:xfrm>
           <a:prstGeom prst="rect">
             <a:avLst/>
@@ -5234,7 +4970,7 @@
         <p:spPr>
           <a:xfrm>
             <a:off x="475560" y="3328560"/>
-            <a:ext cx="237240" cy="237240"/>
+            <a:ext cx="236880" cy="236880"/>
           </a:xfrm>
           <a:prstGeom prst="rect">
             <a:avLst/>
@@ -5253,7 +4989,7 @@
         <p:spPr>
           <a:xfrm>
             <a:off x="786240" y="3237120"/>
-            <a:ext cx="2285640" cy="273960"/>
+            <a:ext cx="2285280" cy="273600"/>
           </a:xfrm>
           <a:prstGeom prst="rect">
             <a:avLst/>
@@ -5308,7 +5044,7 @@
         <p:spPr>
           <a:xfrm>
             <a:off x="786240" y="3493080"/>
-            <a:ext cx="7954920" cy="219240"/>
+            <a:ext cx="7954560" cy="218880"/>
           </a:xfrm>
           <a:prstGeom prst="rect">
             <a:avLst/>
@@ -5363,7 +5099,7 @@
         <p:spPr>
           <a:xfrm>
             <a:off x="320040" y="3822120"/>
-            <a:ext cx="8503560" cy="603000"/>
+            <a:ext cx="8503200" cy="602640"/>
           </a:xfrm>
           <a:prstGeom prst="rect">
             <a:avLst/>
@@ -5398,7 +5134,7 @@
         <p:spPr>
           <a:xfrm>
             <a:off x="320040" y="3822120"/>
-            <a:ext cx="54360" cy="603000"/>
+            <a:ext cx="54000" cy="602640"/>
           </a:xfrm>
           <a:prstGeom prst="rect">
             <a:avLst/>
@@ -5430,7 +5166,7 @@
         <p:spPr>
           <a:xfrm>
             <a:off x="475560" y="4005000"/>
-            <a:ext cx="237240" cy="237240"/>
+            <a:ext cx="236880" cy="236880"/>
           </a:xfrm>
           <a:prstGeom prst="rect">
             <a:avLst/>
@@ -5449,7 +5185,7 @@
         <p:spPr>
           <a:xfrm>
             <a:off x="786240" y="3913560"/>
-            <a:ext cx="2285640" cy="273960"/>
+            <a:ext cx="2285280" cy="273600"/>
           </a:xfrm>
           <a:prstGeom prst="rect">
             <a:avLst/>
@@ -5504,7 +5240,7 @@
         <p:spPr>
           <a:xfrm>
             <a:off x="786240" y="4169520"/>
-            <a:ext cx="7954920" cy="219240"/>
+            <a:ext cx="7954560" cy="218880"/>
           </a:xfrm>
           <a:prstGeom prst="rect">
             <a:avLst/>
@@ -5559,7 +5295,7 @@
         <p:spPr>
           <a:xfrm>
             <a:off x="320040" y="4498920"/>
-            <a:ext cx="8503560" cy="603000"/>
+            <a:ext cx="8503200" cy="602640"/>
           </a:xfrm>
           <a:prstGeom prst="rect">
             <a:avLst/>
@@ -5589,7 +5325,7 @@
         <p:spPr>
           <a:xfrm>
             <a:off x="320040" y="4498920"/>
-            <a:ext cx="54360" cy="603000"/>
+            <a:ext cx="54000" cy="602640"/>
           </a:xfrm>
           <a:prstGeom prst="rect">
             <a:avLst/>
@@ -5621,7 +5357,7 @@
         <p:spPr>
           <a:xfrm>
             <a:off x="475560" y="4681800"/>
-            <a:ext cx="237240" cy="237240"/>
+            <a:ext cx="236880" cy="236880"/>
           </a:xfrm>
           <a:prstGeom prst="rect">
             <a:avLst/>
@@ -5640,7 +5376,7 @@
         <p:spPr>
           <a:xfrm>
             <a:off x="786240" y="4590360"/>
-            <a:ext cx="2925720" cy="273960"/>
+            <a:ext cx="2925360" cy="273600"/>
           </a:xfrm>
           <a:prstGeom prst="rect">
             <a:avLst/>
@@ -5695,7 +5431,7 @@
         <p:spPr>
           <a:xfrm>
             <a:off x="786240" y="4846320"/>
-            <a:ext cx="7954920" cy="219240"/>
+            <a:ext cx="7954560" cy="218880"/>
           </a:xfrm>
           <a:prstGeom prst="rect">
             <a:avLst/>
@@ -5787,7 +5523,7 @@
         <p:spPr>
           <a:xfrm>
             <a:off x="0" y="0"/>
-            <a:ext cx="9143640" cy="959760"/>
+            <a:ext cx="9143280" cy="959400"/>
           </a:xfrm>
           <a:prstGeom prst="rect">
             <a:avLst/>
@@ -5815,7 +5551,7 @@
         <p:spPr>
           <a:xfrm>
             <a:off x="0" y="960120"/>
-            <a:ext cx="9143640" cy="54360"/>
+            <a:ext cx="9143280" cy="54000"/>
           </a:xfrm>
           <a:prstGeom prst="rect">
             <a:avLst/>
@@ -5847,7 +5583,7 @@
         <p:spPr>
           <a:xfrm>
             <a:off x="320040" y="182880"/>
-            <a:ext cx="548280" cy="548280"/>
+            <a:ext cx="547920" cy="547920"/>
           </a:xfrm>
           <a:prstGeom prst="rect">
             <a:avLst/>
@@ -5866,7 +5602,7 @@
         <p:spPr>
           <a:xfrm>
             <a:off x="1005840" y="182880"/>
-            <a:ext cx="7772040" cy="594000"/>
+            <a:ext cx="7771680" cy="593640"/>
           </a:xfrm>
           <a:prstGeom prst="rect">
             <a:avLst/>
@@ -5921,7 +5657,7 @@
         <p:spPr>
           <a:xfrm>
             <a:off x="320040" y="1115640"/>
-            <a:ext cx="2742840" cy="1718640"/>
+            <a:ext cx="2742480" cy="1718280"/>
           </a:xfrm>
           <a:prstGeom prst="rect">
             <a:avLst/>
@@ -5956,7 +5692,7 @@
         <p:spPr>
           <a:xfrm>
             <a:off x="320040" y="1115640"/>
-            <a:ext cx="2742840" cy="456840"/>
+            <a:ext cx="2742480" cy="456480"/>
           </a:xfrm>
           <a:prstGeom prst="rect">
             <a:avLst/>
@@ -5984,7 +5720,7 @@
         <p:spPr>
           <a:xfrm>
             <a:off x="429840" y="1207080"/>
-            <a:ext cx="273960" cy="273960"/>
+            <a:ext cx="273600" cy="273600"/>
           </a:xfrm>
           <a:prstGeom prst="ellipse">
             <a:avLst/>
@@ -6014,7 +5750,7 @@
         <p:spPr>
           <a:xfrm>
             <a:off x="429840" y="1207080"/>
-            <a:ext cx="273960" cy="273960"/>
+            <a:ext cx="273600" cy="273600"/>
           </a:xfrm>
           <a:prstGeom prst="rect">
             <a:avLst/>
@@ -6050,6 +5786,7 @@
                   <a:srgbClr val="ffffff"/>
                 </a:solidFill>
                 <a:latin typeface="Calibri"/>
+                <a:ea typeface="DejaVu Sans"/>
               </a:rPr>
               <a:t>1</a:t>
             </a:r>
@@ -6068,7 +5805,7 @@
         <p:spPr>
           <a:xfrm>
             <a:off x="795600" y="1207080"/>
-            <a:ext cx="2175840" cy="292320"/>
+            <a:ext cx="2175480" cy="291960"/>
           </a:xfrm>
           <a:prstGeom prst="rect">
             <a:avLst/>
@@ -6123,7 +5860,7 @@
         <p:spPr>
           <a:xfrm>
             <a:off x="429840" y="1682640"/>
-            <a:ext cx="2523240" cy="1060200"/>
+            <a:ext cx="2522880" cy="1059840"/>
           </a:xfrm>
           <a:prstGeom prst="rect">
             <a:avLst/>
@@ -6178,7 +5915,7 @@
         <p:spPr>
           <a:xfrm>
             <a:off x="3264480" y="1115640"/>
-            <a:ext cx="2742840" cy="1718640"/>
+            <a:ext cx="2742480" cy="1718280"/>
           </a:xfrm>
           <a:prstGeom prst="rect">
             <a:avLst/>
@@ -6213,7 +5950,7 @@
         <p:spPr>
           <a:xfrm>
             <a:off x="3264480" y="1115640"/>
-            <a:ext cx="2742840" cy="456840"/>
+            <a:ext cx="2742480" cy="456480"/>
           </a:xfrm>
           <a:prstGeom prst="rect">
             <a:avLst/>
@@ -6241,7 +5978,7 @@
         <p:spPr>
           <a:xfrm>
             <a:off x="3374280" y="1207080"/>
-            <a:ext cx="273960" cy="273960"/>
+            <a:ext cx="273600" cy="273600"/>
           </a:xfrm>
           <a:prstGeom prst="ellipse">
             <a:avLst/>
@@ -6271,7 +6008,7 @@
         <p:spPr>
           <a:xfrm>
             <a:off x="3374280" y="1207080"/>
-            <a:ext cx="273960" cy="273960"/>
+            <a:ext cx="273600" cy="273600"/>
           </a:xfrm>
           <a:prstGeom prst="rect">
             <a:avLst/>
@@ -6307,6 +6044,7 @@
                   <a:srgbClr val="ffffff"/>
                 </a:solidFill>
                 <a:latin typeface="Calibri"/>
+                <a:ea typeface="DejaVu Sans"/>
               </a:rPr>
               <a:t>2</a:t>
             </a:r>
@@ -6325,7 +6063,7 @@
         <p:spPr>
           <a:xfrm>
             <a:off x="3740040" y="1207080"/>
-            <a:ext cx="2175840" cy="292320"/>
+            <a:ext cx="2175480" cy="291960"/>
           </a:xfrm>
           <a:prstGeom prst="rect">
             <a:avLst/>
@@ -6380,7 +6118,7 @@
         <p:spPr>
           <a:xfrm>
             <a:off x="3374280" y="1682640"/>
-            <a:ext cx="2523240" cy="1060200"/>
+            <a:ext cx="2522880" cy="1059840"/>
           </a:xfrm>
           <a:prstGeom prst="rect">
             <a:avLst/>
@@ -6435,7 +6173,7 @@
         <p:spPr>
           <a:xfrm>
             <a:off x="6208920" y="1115640"/>
-            <a:ext cx="2742840" cy="1718640"/>
+            <a:ext cx="2742480" cy="1718280"/>
           </a:xfrm>
           <a:prstGeom prst="rect">
             <a:avLst/>
@@ -6470,7 +6208,7 @@
         <p:spPr>
           <a:xfrm>
             <a:off x="6208920" y="1115640"/>
-            <a:ext cx="2742840" cy="456840"/>
+            <a:ext cx="2742480" cy="456480"/>
           </a:xfrm>
           <a:prstGeom prst="rect">
             <a:avLst/>
@@ -6498,7 +6236,7 @@
         <p:spPr>
           <a:xfrm>
             <a:off x="6318360" y="1207080"/>
-            <a:ext cx="273960" cy="273960"/>
+            <a:ext cx="273600" cy="273600"/>
           </a:xfrm>
           <a:prstGeom prst="ellipse">
             <a:avLst/>
@@ -6528,7 +6266,7 @@
         <p:spPr>
           <a:xfrm>
             <a:off x="6318360" y="1207080"/>
-            <a:ext cx="273960" cy="273960"/>
+            <a:ext cx="273600" cy="273600"/>
           </a:xfrm>
           <a:prstGeom prst="rect">
             <a:avLst/>
@@ -6564,6 +6302,7 @@
                   <a:srgbClr val="ffffff"/>
                 </a:solidFill>
                 <a:latin typeface="Calibri"/>
+                <a:ea typeface="DejaVu Sans"/>
               </a:rPr>
               <a:t>3</a:t>
             </a:r>
@@ -6582,7 +6321,7 @@
         <p:spPr>
           <a:xfrm>
             <a:off x="6684120" y="1207080"/>
-            <a:ext cx="2175840" cy="292320"/>
+            <a:ext cx="2175480" cy="291960"/>
           </a:xfrm>
           <a:prstGeom prst="rect">
             <a:avLst/>
@@ -6637,7 +6376,7 @@
         <p:spPr>
           <a:xfrm>
             <a:off x="6318360" y="1682640"/>
-            <a:ext cx="2523240" cy="1060200"/>
+            <a:ext cx="2522880" cy="1059840"/>
           </a:xfrm>
           <a:prstGeom prst="rect">
             <a:avLst/>
@@ -6692,7 +6431,7 @@
         <p:spPr>
           <a:xfrm>
             <a:off x="320040" y="3035880"/>
-            <a:ext cx="2742840" cy="1718640"/>
+            <a:ext cx="2742480" cy="1718280"/>
           </a:xfrm>
           <a:prstGeom prst="rect">
             <a:avLst/>
@@ -6727,7 +6466,7 @@
         <p:spPr>
           <a:xfrm>
             <a:off x="320040" y="3035880"/>
-            <a:ext cx="2742840" cy="456840"/>
+            <a:ext cx="2742480" cy="456480"/>
           </a:xfrm>
           <a:prstGeom prst="rect">
             <a:avLst/>
@@ -6755,7 +6494,7 @@
         <p:spPr>
           <a:xfrm>
             <a:off x="429840" y="3127320"/>
-            <a:ext cx="273960" cy="273960"/>
+            <a:ext cx="273600" cy="273600"/>
           </a:xfrm>
           <a:prstGeom prst="ellipse">
             <a:avLst/>
@@ -6785,7 +6524,7 @@
         <p:spPr>
           <a:xfrm>
             <a:off x="429840" y="3127320"/>
-            <a:ext cx="273960" cy="273960"/>
+            <a:ext cx="273600" cy="273600"/>
           </a:xfrm>
           <a:prstGeom prst="rect">
             <a:avLst/>
@@ -6821,6 +6560,7 @@
                   <a:srgbClr val="ffffff"/>
                 </a:solidFill>
                 <a:latin typeface="Calibri"/>
+                <a:ea typeface="DejaVu Sans"/>
               </a:rPr>
               <a:t>4</a:t>
             </a:r>
@@ -6839,7 +6579,7 @@
         <p:spPr>
           <a:xfrm>
             <a:off x="795600" y="3127320"/>
-            <a:ext cx="2175840" cy="292320"/>
+            <a:ext cx="2175480" cy="291960"/>
           </a:xfrm>
           <a:prstGeom prst="rect">
             <a:avLst/>
@@ -6894,7 +6634,7 @@
         <p:spPr>
           <a:xfrm>
             <a:off x="429840" y="3602880"/>
-            <a:ext cx="2523240" cy="1060200"/>
+            <a:ext cx="2522880" cy="1059840"/>
           </a:xfrm>
           <a:prstGeom prst="rect">
             <a:avLst/>
@@ -6949,7 +6689,7 @@
         <p:spPr>
           <a:xfrm>
             <a:off x="3264480" y="3035880"/>
-            <a:ext cx="2742840" cy="1718640"/>
+            <a:ext cx="2742480" cy="1718280"/>
           </a:xfrm>
           <a:prstGeom prst="rect">
             <a:avLst/>
@@ -6984,7 +6724,7 @@
         <p:spPr>
           <a:xfrm>
             <a:off x="3264480" y="3035880"/>
-            <a:ext cx="2742840" cy="456840"/>
+            <a:ext cx="2742480" cy="456480"/>
           </a:xfrm>
           <a:prstGeom prst="rect">
             <a:avLst/>
@@ -7012,7 +6752,7 @@
         <p:spPr>
           <a:xfrm>
             <a:off x="3374280" y="3127320"/>
-            <a:ext cx="273960" cy="273960"/>
+            <a:ext cx="273600" cy="273600"/>
           </a:xfrm>
           <a:prstGeom prst="ellipse">
             <a:avLst/>
@@ -7042,7 +6782,7 @@
         <p:spPr>
           <a:xfrm>
             <a:off x="3374280" y="3127320"/>
-            <a:ext cx="273960" cy="273960"/>
+            <a:ext cx="273600" cy="273600"/>
           </a:xfrm>
           <a:prstGeom prst="rect">
             <a:avLst/>
@@ -7078,6 +6818,7 @@
                   <a:srgbClr val="ffffff"/>
                 </a:solidFill>
                 <a:latin typeface="Calibri"/>
+                <a:ea typeface="DejaVu Sans"/>
               </a:rPr>
               <a:t>5</a:t>
             </a:r>
@@ -7096,7 +6837,7 @@
         <p:spPr>
           <a:xfrm>
             <a:off x="3740040" y="3127320"/>
-            <a:ext cx="2175840" cy="292320"/>
+            <a:ext cx="2175480" cy="291960"/>
           </a:xfrm>
           <a:prstGeom prst="rect">
             <a:avLst/>
@@ -7151,7 +6892,7 @@
         <p:spPr>
           <a:xfrm>
             <a:off x="3374280" y="3602880"/>
-            <a:ext cx="2523240" cy="1060200"/>
+            <a:ext cx="2522880" cy="1059840"/>
           </a:xfrm>
           <a:prstGeom prst="rect">
             <a:avLst/>
@@ -7206,7 +6947,7 @@
         <p:spPr>
           <a:xfrm>
             <a:off x="6208920" y="3035880"/>
-            <a:ext cx="2742840" cy="1718640"/>
+            <a:ext cx="2742480" cy="1718280"/>
           </a:xfrm>
           <a:prstGeom prst="rect">
             <a:avLst/>
@@ -7241,7 +6982,7 @@
         <p:spPr>
           <a:xfrm>
             <a:off x="6208920" y="3035880"/>
-            <a:ext cx="2742840" cy="456840"/>
+            <a:ext cx="2742480" cy="456480"/>
           </a:xfrm>
           <a:prstGeom prst="rect">
             <a:avLst/>
@@ -7269,7 +7010,7 @@
         <p:spPr>
           <a:xfrm>
             <a:off x="6318360" y="3127320"/>
-            <a:ext cx="273960" cy="273960"/>
+            <a:ext cx="273600" cy="273600"/>
           </a:xfrm>
           <a:prstGeom prst="ellipse">
             <a:avLst/>
@@ -7299,7 +7040,7 @@
         <p:spPr>
           <a:xfrm>
             <a:off x="6318360" y="3127320"/>
-            <a:ext cx="273960" cy="273960"/>
+            <a:ext cx="273600" cy="273600"/>
           </a:xfrm>
           <a:prstGeom prst="rect">
             <a:avLst/>
@@ -7335,6 +7076,7 @@
                   <a:srgbClr val="ffffff"/>
                 </a:solidFill>
                 <a:latin typeface="Calibri"/>
+                <a:ea typeface="DejaVu Sans"/>
               </a:rPr>
               <a:t>6</a:t>
             </a:r>
@@ -7353,7 +7095,7 @@
         <p:spPr>
           <a:xfrm>
             <a:off x="6684120" y="3127320"/>
-            <a:ext cx="2175840" cy="292320"/>
+            <a:ext cx="2175480" cy="291960"/>
           </a:xfrm>
           <a:prstGeom prst="rect">
             <a:avLst/>
@@ -7408,7 +7150,7 @@
         <p:spPr>
           <a:xfrm>
             <a:off x="6318360" y="3602880"/>
-            <a:ext cx="2523240" cy="1060200"/>
+            <a:ext cx="2522880" cy="1059840"/>
           </a:xfrm>
           <a:prstGeom prst="rect">
             <a:avLst/>
@@ -7463,7 +7205,7 @@
         <p:spPr>
           <a:xfrm>
             <a:off x="320040" y="4892040"/>
-            <a:ext cx="8503560" cy="219240"/>
+            <a:ext cx="8503200" cy="218880"/>
           </a:xfrm>
           <a:prstGeom prst="rect">
             <a:avLst/>
@@ -7493,7 +7235,7 @@
         <p:spPr>
           <a:xfrm>
             <a:off x="457200" y="4910400"/>
-            <a:ext cx="8229240" cy="182520"/>
+            <a:ext cx="8228880" cy="182160"/>
           </a:xfrm>
           <a:prstGeom prst="rect">
             <a:avLst/>
@@ -7585,7 +7327,7 @@
         <p:spPr>
           <a:xfrm>
             <a:off x="0" y="0"/>
-            <a:ext cx="9143640" cy="959760"/>
+            <a:ext cx="9143280" cy="959400"/>
           </a:xfrm>
           <a:prstGeom prst="rect">
             <a:avLst/>
@@ -7613,7 +7355,7 @@
         <p:spPr>
           <a:xfrm>
             <a:off x="0" y="960120"/>
-            <a:ext cx="9143640" cy="54360"/>
+            <a:ext cx="9143280" cy="54000"/>
           </a:xfrm>
           <a:prstGeom prst="rect">
             <a:avLst/>
@@ -7645,7 +7387,7 @@
         <p:spPr>
           <a:xfrm>
             <a:off x="320040" y="182880"/>
-            <a:ext cx="548280" cy="548280"/>
+            <a:ext cx="547920" cy="547920"/>
           </a:xfrm>
           <a:prstGeom prst="rect">
             <a:avLst/>
@@ -7664,7 +7406,7 @@
         <p:spPr>
           <a:xfrm>
             <a:off x="1005840" y="182880"/>
-            <a:ext cx="7772040" cy="594000"/>
+            <a:ext cx="7771680" cy="593640"/>
           </a:xfrm>
           <a:prstGeom prst="rect">
             <a:avLst/>
@@ -7719,7 +7461,7 @@
         <p:spPr>
           <a:xfrm>
             <a:off x="320040" y="1115640"/>
-            <a:ext cx="8503560" cy="529920"/>
+            <a:ext cx="8503200" cy="529560"/>
           </a:xfrm>
           <a:prstGeom prst="rect">
             <a:avLst/>
@@ -7749,7 +7491,7 @@
         <p:spPr>
           <a:xfrm>
             <a:off x="320040" y="1115640"/>
-            <a:ext cx="63720" cy="529920"/>
+            <a:ext cx="63360" cy="529560"/>
           </a:xfrm>
           <a:prstGeom prst="rect">
             <a:avLst/>
@@ -7777,7 +7519,7 @@
         <p:spPr>
           <a:xfrm>
             <a:off x="475560" y="1207080"/>
-            <a:ext cx="8229240" cy="347040"/>
+            <a:ext cx="8228880" cy="346680"/>
           </a:xfrm>
           <a:prstGeom prst="rect">
             <a:avLst/>
@@ -7832,7 +7574,7 @@
         <p:spPr>
           <a:xfrm>
             <a:off x="320040" y="1874520"/>
-            <a:ext cx="4937400" cy="2697120"/>
+            <a:ext cx="4937040" cy="2696760"/>
           </a:xfrm>
           <a:prstGeom prst="rect">
             <a:avLst/>
@@ -7867,7 +7609,7 @@
         <p:spPr>
           <a:xfrm>
             <a:off x="457200" y="1984320"/>
-            <a:ext cx="4736160" cy="2495880"/>
+            <a:ext cx="4735800" cy="2495520"/>
           </a:xfrm>
           <a:prstGeom prst="rect">
             <a:avLst/>
@@ -8500,7 +8242,7 @@
         <p:spPr>
           <a:xfrm>
             <a:off x="320040" y="4690800"/>
-            <a:ext cx="4937400" cy="383760"/>
+            <a:ext cx="4937040" cy="383400"/>
           </a:xfrm>
           <a:prstGeom prst="rect">
             <a:avLst/>
@@ -8528,7 +8270,7 @@
         <p:spPr>
           <a:xfrm>
             <a:off x="457200" y="4745880"/>
-            <a:ext cx="4754520" cy="219240"/>
+            <a:ext cx="4754160" cy="218880"/>
           </a:xfrm>
           <a:prstGeom prst="rect">
             <a:avLst/>
@@ -8583,7 +8325,7 @@
         <p:spPr>
           <a:xfrm>
             <a:off x="457200" y="4983480"/>
-            <a:ext cx="4736160" cy="36360"/>
+            <a:ext cx="4735800" cy="36000"/>
           </a:xfrm>
           <a:prstGeom prst="rect">
             <a:avLst/>
@@ -8662,7 +8404,7 @@
         <p:spPr>
           <a:xfrm>
             <a:off x="5440680" y="1783080"/>
-            <a:ext cx="3382920" cy="3291480"/>
+            <a:ext cx="3382560" cy="3291120"/>
           </a:xfrm>
           <a:prstGeom prst="rect">
             <a:avLst/>
@@ -8697,7 +8439,7 @@
         <p:spPr>
           <a:xfrm>
             <a:off x="5440680" y="1783080"/>
-            <a:ext cx="3382920" cy="456840"/>
+            <a:ext cx="3382560" cy="456480"/>
           </a:xfrm>
           <a:prstGeom prst="rect">
             <a:avLst/>
@@ -8725,7 +8467,7 @@
         <p:spPr>
           <a:xfrm>
             <a:off x="5577840" y="1837800"/>
-            <a:ext cx="3108600" cy="347040"/>
+            <a:ext cx="3108240" cy="346680"/>
           </a:xfrm>
           <a:prstGeom prst="rect">
             <a:avLst/>
@@ -8780,7 +8522,7 @@
         <p:spPr>
           <a:xfrm>
             <a:off x="5532120" y="2340720"/>
-            <a:ext cx="3200040" cy="338040"/>
+            <a:ext cx="3199680" cy="337680"/>
           </a:xfrm>
           <a:prstGeom prst="rect">
             <a:avLst/>
@@ -8808,7 +8550,7 @@
         <p:spPr>
           <a:xfrm>
             <a:off x="5532120" y="2340720"/>
-            <a:ext cx="54360" cy="338040"/>
+            <a:ext cx="54000" cy="337680"/>
           </a:xfrm>
           <a:prstGeom prst="rect">
             <a:avLst/>
@@ -8836,7 +8578,7 @@
         <p:spPr>
           <a:xfrm>
             <a:off x="5650920" y="2368440"/>
-            <a:ext cx="1325520" cy="255600"/>
+            <a:ext cx="1325160" cy="255240"/>
           </a:xfrm>
           <a:prstGeom prst="rect">
             <a:avLst/>
@@ -8891,7 +8633,7 @@
         <p:spPr>
           <a:xfrm>
             <a:off x="6967800" y="2368440"/>
-            <a:ext cx="1663920" cy="255600"/>
+            <a:ext cx="1663560" cy="255240"/>
           </a:xfrm>
           <a:prstGeom prst="rect">
             <a:avLst/>
@@ -8946,7 +8688,7 @@
         <p:spPr>
           <a:xfrm>
             <a:off x="5532120" y="2734200"/>
-            <a:ext cx="3200040" cy="338040"/>
+            <a:ext cx="3199680" cy="337680"/>
           </a:xfrm>
           <a:prstGeom prst="rect">
             <a:avLst/>
@@ -8974,7 +8716,7 @@
         <p:spPr>
           <a:xfrm>
             <a:off x="5532120" y="2734200"/>
-            <a:ext cx="54360" cy="338040"/>
+            <a:ext cx="54000" cy="337680"/>
           </a:xfrm>
           <a:prstGeom prst="rect">
             <a:avLst/>
@@ -9002,7 +8744,7 @@
         <p:spPr>
           <a:xfrm>
             <a:off x="5650920" y="2761560"/>
-            <a:ext cx="1325520" cy="255600"/>
+            <a:ext cx="1325160" cy="255240"/>
           </a:xfrm>
           <a:prstGeom prst="rect">
             <a:avLst/>
@@ -9057,7 +8799,7 @@
         <p:spPr>
           <a:xfrm>
             <a:off x="6967800" y="2761560"/>
-            <a:ext cx="1663920" cy="255600"/>
+            <a:ext cx="1663560" cy="255240"/>
           </a:xfrm>
           <a:prstGeom prst="rect">
             <a:avLst/>
@@ -9112,7 +8854,7 @@
         <p:spPr>
           <a:xfrm>
             <a:off x="5532120" y="3127320"/>
-            <a:ext cx="3200040" cy="338040"/>
+            <a:ext cx="3199680" cy="337680"/>
           </a:xfrm>
           <a:prstGeom prst="rect">
             <a:avLst/>
@@ -9140,7 +8882,7 @@
         <p:spPr>
           <a:xfrm>
             <a:off x="5532120" y="3127320"/>
-            <a:ext cx="54360" cy="338040"/>
+            <a:ext cx="54000" cy="337680"/>
           </a:xfrm>
           <a:prstGeom prst="rect">
             <a:avLst/>
@@ -9168,7 +8910,7 @@
         <p:spPr>
           <a:xfrm>
             <a:off x="5650920" y="3154680"/>
-            <a:ext cx="1325520" cy="255600"/>
+            <a:ext cx="1325160" cy="255240"/>
           </a:xfrm>
           <a:prstGeom prst="rect">
             <a:avLst/>
@@ -9223,7 +8965,7 @@
         <p:spPr>
           <a:xfrm>
             <a:off x="6967800" y="3154680"/>
-            <a:ext cx="1663920" cy="255600"/>
+            <a:ext cx="1663560" cy="255240"/>
           </a:xfrm>
           <a:prstGeom prst="rect">
             <a:avLst/>
@@ -9278,7 +9020,7 @@
         <p:spPr>
           <a:xfrm>
             <a:off x="5532120" y="3520440"/>
-            <a:ext cx="3200040" cy="338040"/>
+            <a:ext cx="3199680" cy="337680"/>
           </a:xfrm>
           <a:prstGeom prst="rect">
             <a:avLst/>
@@ -9306,7 +9048,7 @@
         <p:spPr>
           <a:xfrm>
             <a:off x="5532120" y="3520440"/>
-            <a:ext cx="54360" cy="338040"/>
+            <a:ext cx="54000" cy="337680"/>
           </a:xfrm>
           <a:prstGeom prst="rect">
             <a:avLst/>
@@ -9334,7 +9076,7 @@
         <p:spPr>
           <a:xfrm>
             <a:off x="5650920" y="3547800"/>
-            <a:ext cx="1325520" cy="255600"/>
+            <a:ext cx="1325160" cy="255240"/>
           </a:xfrm>
           <a:prstGeom prst="rect">
             <a:avLst/>
@@ -9389,7 +9131,7 @@
         <p:spPr>
           <a:xfrm>
             <a:off x="6967800" y="3547800"/>
-            <a:ext cx="1663920" cy="255600"/>
+            <a:ext cx="1663560" cy="255240"/>
           </a:xfrm>
           <a:prstGeom prst="rect">
             <a:avLst/>
@@ -9444,7 +9186,7 @@
         <p:spPr>
           <a:xfrm>
             <a:off x="5532120" y="3913560"/>
-            <a:ext cx="3200040" cy="338040"/>
+            <a:ext cx="3199680" cy="337680"/>
           </a:xfrm>
           <a:prstGeom prst="rect">
             <a:avLst/>
@@ -9472,7 +9214,7 @@
         <p:spPr>
           <a:xfrm>
             <a:off x="5532120" y="3913560"/>
-            <a:ext cx="54360" cy="338040"/>
+            <a:ext cx="54000" cy="337680"/>
           </a:xfrm>
           <a:prstGeom prst="rect">
             <a:avLst/>
@@ -9500,7 +9242,7 @@
         <p:spPr>
           <a:xfrm>
             <a:off x="5650920" y="3940920"/>
-            <a:ext cx="1325520" cy="255600"/>
+            <a:ext cx="1325160" cy="255240"/>
           </a:xfrm>
           <a:prstGeom prst="rect">
             <a:avLst/>
@@ -9555,7 +9297,7 @@
         <p:spPr>
           <a:xfrm>
             <a:off x="6967800" y="3940920"/>
-            <a:ext cx="1663920" cy="255600"/>
+            <a:ext cx="1663560" cy="255240"/>
           </a:xfrm>
           <a:prstGeom prst="rect">
             <a:avLst/>
@@ -9610,7 +9352,7 @@
         <p:spPr>
           <a:xfrm>
             <a:off x="5532120" y="4306680"/>
-            <a:ext cx="3200040" cy="338040"/>
+            <a:ext cx="3199680" cy="337680"/>
           </a:xfrm>
           <a:prstGeom prst="rect">
             <a:avLst/>
@@ -9638,7 +9380,7 @@
         <p:spPr>
           <a:xfrm>
             <a:off x="5532120" y="4306680"/>
-            <a:ext cx="54360" cy="338040"/>
+            <a:ext cx="54000" cy="337680"/>
           </a:xfrm>
           <a:prstGeom prst="rect">
             <a:avLst/>
@@ -9666,7 +9408,7 @@
         <p:spPr>
           <a:xfrm>
             <a:off x="5650920" y="4334400"/>
-            <a:ext cx="1325520" cy="255600"/>
+            <a:ext cx="1325160" cy="255240"/>
           </a:xfrm>
           <a:prstGeom prst="rect">
             <a:avLst/>
@@ -9721,7 +9463,7 @@
         <p:spPr>
           <a:xfrm>
             <a:off x="6967800" y="4334400"/>
-            <a:ext cx="1663920" cy="255600"/>
+            <a:ext cx="1663560" cy="255240"/>
           </a:xfrm>
           <a:prstGeom prst="rect">
             <a:avLst/>
@@ -9776,7 +9518,7 @@
         <p:spPr>
           <a:xfrm>
             <a:off x="5532120" y="4700160"/>
-            <a:ext cx="3200040" cy="338040"/>
+            <a:ext cx="3199680" cy="337680"/>
           </a:xfrm>
           <a:prstGeom prst="rect">
             <a:avLst/>
@@ -9804,7 +9546,7 @@
         <p:spPr>
           <a:xfrm>
             <a:off x="5532120" y="4700160"/>
-            <a:ext cx="54360" cy="338040"/>
+            <a:ext cx="54000" cy="337680"/>
           </a:xfrm>
           <a:prstGeom prst="rect">
             <a:avLst/>
@@ -9832,7 +9574,7 @@
         <p:spPr>
           <a:xfrm>
             <a:off x="5650920" y="4727520"/>
-            <a:ext cx="1325520" cy="255600"/>
+            <a:ext cx="1325160" cy="255240"/>
           </a:xfrm>
           <a:prstGeom prst="rect">
             <a:avLst/>
@@ -9887,7 +9629,7 @@
         <p:spPr>
           <a:xfrm>
             <a:off x="6967800" y="4727520"/>
-            <a:ext cx="1663920" cy="255600"/>
+            <a:ext cx="1663560" cy="255240"/>
           </a:xfrm>
           <a:prstGeom prst="rect">
             <a:avLst/>
@@ -9942,7 +9684,7 @@
         <p:spPr>
           <a:xfrm>
             <a:off x="5532120" y="5093280"/>
-            <a:ext cx="3200040" cy="338040"/>
+            <a:ext cx="3199680" cy="337680"/>
           </a:xfrm>
           <a:prstGeom prst="rect">
             <a:avLst/>
@@ -9970,7 +9712,7 @@
         <p:spPr>
           <a:xfrm>
             <a:off x="5532120" y="5093280"/>
-            <a:ext cx="54360" cy="338040"/>
+            <a:ext cx="54000" cy="337680"/>
           </a:xfrm>
           <a:prstGeom prst="rect">
             <a:avLst/>
@@ -9998,7 +9740,7 @@
         <p:spPr>
           <a:xfrm>
             <a:off x="5650920" y="5120640"/>
-            <a:ext cx="1325520" cy="255600"/>
+            <a:ext cx="1325160" cy="255240"/>
           </a:xfrm>
           <a:prstGeom prst="rect">
             <a:avLst/>
@@ -10053,7 +9795,7 @@
         <p:spPr>
           <a:xfrm>
             <a:off x="6967800" y="5120640"/>
-            <a:ext cx="1663920" cy="255600"/>
+            <a:ext cx="1663560" cy="255240"/>
           </a:xfrm>
           <a:prstGeom prst="rect">
             <a:avLst/>
@@ -10145,7 +9887,7 @@
         <p:spPr>
           <a:xfrm>
             <a:off x="0" y="0"/>
-            <a:ext cx="9143640" cy="959760"/>
+            <a:ext cx="9143280" cy="959400"/>
           </a:xfrm>
           <a:prstGeom prst="rect">
             <a:avLst/>
@@ -10173,7 +9915,7 @@
         <p:spPr>
           <a:xfrm>
             <a:off x="0" y="960120"/>
-            <a:ext cx="9143640" cy="54360"/>
+            <a:ext cx="9143280" cy="54000"/>
           </a:xfrm>
           <a:prstGeom prst="rect">
             <a:avLst/>
@@ -10205,7 +9947,7 @@
         <p:spPr>
           <a:xfrm>
             <a:off x="320040" y="182880"/>
-            <a:ext cx="548280" cy="548280"/>
+            <a:ext cx="547920" cy="547920"/>
           </a:xfrm>
           <a:prstGeom prst="rect">
             <a:avLst/>
@@ -10224,7 +9966,7 @@
         <p:spPr>
           <a:xfrm>
             <a:off x="1005840" y="182880"/>
-            <a:ext cx="7772040" cy="594000"/>
+            <a:ext cx="7771680" cy="593640"/>
           </a:xfrm>
           <a:prstGeom prst="rect">
             <a:avLst/>
@@ -10279,7 +10021,7 @@
         <p:spPr>
           <a:xfrm>
             <a:off x="320040" y="1115640"/>
-            <a:ext cx="8503560" cy="529920"/>
+            <a:ext cx="8503200" cy="529560"/>
           </a:xfrm>
           <a:prstGeom prst="rect">
             <a:avLst/>
@@ -10309,7 +10051,7 @@
         <p:spPr>
           <a:xfrm>
             <a:off x="320040" y="1115640"/>
-            <a:ext cx="63720" cy="529920"/>
+            <a:ext cx="63360" cy="529560"/>
           </a:xfrm>
           <a:prstGeom prst="rect">
             <a:avLst/>
@@ -10337,7 +10079,7 @@
         <p:spPr>
           <a:xfrm>
             <a:off x="475560" y="1207080"/>
-            <a:ext cx="8229240" cy="347040"/>
+            <a:ext cx="8228880" cy="346680"/>
           </a:xfrm>
           <a:prstGeom prst="rect">
             <a:avLst/>
@@ -10392,7 +10134,7 @@
         <p:spPr>
           <a:xfrm>
             <a:off x="320040" y="1645560"/>
-            <a:ext cx="4937400" cy="3034440"/>
+            <a:ext cx="4937040" cy="3034080"/>
           </a:xfrm>
           <a:prstGeom prst="rect">
             <a:avLst/>
@@ -10427,7 +10169,7 @@
         <p:spPr>
           <a:xfrm>
             <a:off x="457200" y="2267640"/>
-            <a:ext cx="4736160" cy="1737000"/>
+            <a:ext cx="4735800" cy="1736640"/>
           </a:xfrm>
           <a:prstGeom prst="rect">
             <a:avLst/>
@@ -10942,7 +10684,7 @@
         <p:spPr>
           <a:xfrm>
             <a:off x="320040" y="4500000"/>
-            <a:ext cx="4937400" cy="502560"/>
+            <a:ext cx="4937040" cy="502200"/>
           </a:xfrm>
           <a:prstGeom prst="rect">
             <a:avLst/>
@@ -10970,7 +10712,7 @@
         <p:spPr>
           <a:xfrm>
             <a:off x="457200" y="4260960"/>
-            <a:ext cx="4754520" cy="219240"/>
+            <a:ext cx="4754160" cy="218880"/>
           </a:xfrm>
           <a:prstGeom prst="rect">
             <a:avLst/>
@@ -11099,7 +10841,7 @@
         <p:spPr>
           <a:xfrm>
             <a:off x="457200" y="4498920"/>
-            <a:ext cx="4736160" cy="155160"/>
+            <a:ext cx="4735800" cy="154800"/>
           </a:xfrm>
           <a:prstGeom prst="rect">
             <a:avLst/>
@@ -11154,7 +10896,7 @@
         <p:spPr>
           <a:xfrm>
             <a:off x="5440680" y="1783080"/>
-            <a:ext cx="3382920" cy="2925720"/>
+            <a:ext cx="3382560" cy="2925360"/>
           </a:xfrm>
           <a:prstGeom prst="rect">
             <a:avLst/>
@@ -11189,7 +10931,7 @@
         <p:spPr>
           <a:xfrm>
             <a:off x="5440680" y="1783080"/>
-            <a:ext cx="3382920" cy="456840"/>
+            <a:ext cx="3382560" cy="456480"/>
           </a:xfrm>
           <a:prstGeom prst="rect">
             <a:avLst/>
@@ -11217,7 +10959,7 @@
         <p:spPr>
           <a:xfrm>
             <a:off x="5577840" y="1837800"/>
-            <a:ext cx="3108600" cy="347040"/>
+            <a:ext cx="3108240" cy="346680"/>
           </a:xfrm>
           <a:prstGeom prst="rect">
             <a:avLst/>
@@ -11272,7 +11014,7 @@
         <p:spPr>
           <a:xfrm>
             <a:off x="5532120" y="2350080"/>
-            <a:ext cx="273960" cy="273960"/>
+            <a:ext cx="273600" cy="273600"/>
           </a:xfrm>
           <a:prstGeom prst="ellipse">
             <a:avLst/>
@@ -11300,7 +11042,7 @@
         <p:spPr>
           <a:xfrm>
             <a:off x="5532120" y="2350080"/>
-            <a:ext cx="273960" cy="273960"/>
+            <a:ext cx="273600" cy="273600"/>
           </a:xfrm>
           <a:prstGeom prst="rect">
             <a:avLst/>
@@ -11336,6 +11078,7 @@
                   <a:srgbClr val="0d1b2a"/>
                 </a:solidFill>
                 <a:latin typeface="Calibri"/>
+                <a:ea typeface="DejaVu Sans"/>
               </a:rPr>
               <a:t>1</a:t>
             </a:r>
@@ -11354,7 +11097,7 @@
         <p:spPr>
           <a:xfrm>
             <a:off x="5897880" y="2359080"/>
-            <a:ext cx="2834280" cy="292320"/>
+            <a:ext cx="2833920" cy="291960"/>
           </a:xfrm>
           <a:prstGeom prst="rect">
             <a:avLst/>
@@ -11409,7 +11152,7 @@
         <p:spPr>
           <a:xfrm>
             <a:off x="5664600" y="2624400"/>
-            <a:ext cx="13320" cy="200880"/>
+            <a:ext cx="12960" cy="200520"/>
           </a:xfrm>
           <a:prstGeom prst="rect">
             <a:avLst/>
@@ -11437,7 +11180,7 @@
         <p:spPr>
           <a:xfrm>
             <a:off x="5532120" y="2825640"/>
-            <a:ext cx="273960" cy="273960"/>
+            <a:ext cx="273600" cy="273600"/>
           </a:xfrm>
           <a:prstGeom prst="ellipse">
             <a:avLst/>
@@ -11465,7 +11208,7 @@
         <p:spPr>
           <a:xfrm>
             <a:off x="5532120" y="2825640"/>
-            <a:ext cx="273960" cy="273960"/>
+            <a:ext cx="273600" cy="273600"/>
           </a:xfrm>
           <a:prstGeom prst="rect">
             <a:avLst/>
@@ -11501,6 +11244,7 @@
                   <a:srgbClr val="0d1b2a"/>
                 </a:solidFill>
                 <a:latin typeface="Calibri"/>
+                <a:ea typeface="DejaVu Sans"/>
               </a:rPr>
               <a:t>2</a:t>
             </a:r>
@@ -11519,7 +11263,7 @@
         <p:spPr>
           <a:xfrm>
             <a:off x="5897880" y="2834640"/>
-            <a:ext cx="2834280" cy="292320"/>
+            <a:ext cx="2833920" cy="291960"/>
           </a:xfrm>
           <a:prstGeom prst="rect">
             <a:avLst/>
@@ -11574,7 +11318,7 @@
         <p:spPr>
           <a:xfrm>
             <a:off x="5664600" y="3099960"/>
-            <a:ext cx="13320" cy="200880"/>
+            <a:ext cx="12960" cy="200520"/>
           </a:xfrm>
           <a:prstGeom prst="rect">
             <a:avLst/>
@@ -11602,7 +11346,7 @@
         <p:spPr>
           <a:xfrm>
             <a:off x="5532120" y="3300840"/>
-            <a:ext cx="273960" cy="273960"/>
+            <a:ext cx="273600" cy="273600"/>
           </a:xfrm>
           <a:prstGeom prst="ellipse">
             <a:avLst/>
@@ -11630,7 +11374,7 @@
         <p:spPr>
           <a:xfrm>
             <a:off x="5532120" y="3300840"/>
-            <a:ext cx="273960" cy="273960"/>
+            <a:ext cx="273600" cy="273600"/>
           </a:xfrm>
           <a:prstGeom prst="rect">
             <a:avLst/>
@@ -11666,6 +11410,7 @@
                   <a:srgbClr val="0d1b2a"/>
                 </a:solidFill>
                 <a:latin typeface="Calibri"/>
+                <a:ea typeface="DejaVu Sans"/>
               </a:rPr>
               <a:t>3</a:t>
             </a:r>
@@ -11684,7 +11429,7 @@
         <p:spPr>
           <a:xfrm>
             <a:off x="5897880" y="3310200"/>
-            <a:ext cx="2834280" cy="292320"/>
+            <a:ext cx="2833920" cy="291960"/>
           </a:xfrm>
           <a:prstGeom prst="rect">
             <a:avLst/>
@@ -11739,7 +11484,7 @@
         <p:spPr>
           <a:xfrm>
             <a:off x="5664600" y="3575160"/>
-            <a:ext cx="13320" cy="200880"/>
+            <a:ext cx="12960" cy="200520"/>
           </a:xfrm>
           <a:prstGeom prst="rect">
             <a:avLst/>
@@ -11767,7 +11512,7 @@
         <p:spPr>
           <a:xfrm>
             <a:off x="5532120" y="3776400"/>
-            <a:ext cx="273960" cy="273960"/>
+            <a:ext cx="273600" cy="273600"/>
           </a:xfrm>
           <a:prstGeom prst="ellipse">
             <a:avLst/>
@@ -11795,7 +11540,7 @@
         <p:spPr>
           <a:xfrm>
             <a:off x="5532120" y="3776400"/>
-            <a:ext cx="273960" cy="273960"/>
+            <a:ext cx="273600" cy="273600"/>
           </a:xfrm>
           <a:prstGeom prst="rect">
             <a:avLst/>
@@ -11831,6 +11576,7 @@
                   <a:srgbClr val="0d1b2a"/>
                 </a:solidFill>
                 <a:latin typeface="Calibri"/>
+                <a:ea typeface="DejaVu Sans"/>
               </a:rPr>
               <a:t>4</a:t>
             </a:r>
@@ -11849,7 +11595,7 @@
         <p:spPr>
           <a:xfrm>
             <a:off x="5897880" y="3785760"/>
-            <a:ext cx="2834280" cy="292320"/>
+            <a:ext cx="2833920" cy="291960"/>
           </a:xfrm>
           <a:prstGeom prst="rect">
             <a:avLst/>
@@ -11904,7 +11650,7 @@
         <p:spPr>
           <a:xfrm>
             <a:off x="5664600" y="4050720"/>
-            <a:ext cx="13320" cy="200880"/>
+            <a:ext cx="12960" cy="200520"/>
           </a:xfrm>
           <a:prstGeom prst="rect">
             <a:avLst/>
@@ -11932,7 +11678,7 @@
         <p:spPr>
           <a:xfrm>
             <a:off x="5532120" y="4251960"/>
-            <a:ext cx="273960" cy="273960"/>
+            <a:ext cx="273600" cy="273600"/>
           </a:xfrm>
           <a:prstGeom prst="ellipse">
             <a:avLst/>
@@ -11960,7 +11706,7 @@
         <p:spPr>
           <a:xfrm>
             <a:off x="5532120" y="4251960"/>
-            <a:ext cx="273960" cy="273960"/>
+            <a:ext cx="273600" cy="273600"/>
           </a:xfrm>
           <a:prstGeom prst="rect">
             <a:avLst/>
@@ -11996,6 +11742,7 @@
                   <a:srgbClr val="0d1b2a"/>
                 </a:solidFill>
                 <a:latin typeface="Calibri"/>
+                <a:ea typeface="DejaVu Sans"/>
               </a:rPr>
               <a:t>5</a:t>
             </a:r>
@@ -12014,7 +11761,7 @@
         <p:spPr>
           <a:xfrm>
             <a:off x="5897880" y="4260960"/>
-            <a:ext cx="2834280" cy="292320"/>
+            <a:ext cx="2833920" cy="291960"/>
           </a:xfrm>
           <a:prstGeom prst="rect">
             <a:avLst/>
@@ -12069,7 +11816,7 @@
         <p:spPr>
           <a:xfrm>
             <a:off x="5440680" y="4800600"/>
-            <a:ext cx="3382920" cy="273960"/>
+            <a:ext cx="3382560" cy="273600"/>
           </a:xfrm>
           <a:prstGeom prst="rect">
             <a:avLst/>
@@ -12099,7 +11846,7 @@
         <p:spPr>
           <a:xfrm>
             <a:off x="5532120" y="4827960"/>
-            <a:ext cx="3245760" cy="219240"/>
+            <a:ext cx="3245400" cy="218880"/>
           </a:xfrm>
           <a:prstGeom prst="rect">
             <a:avLst/>
@@ -12191,7 +11938,7 @@
         <p:spPr>
           <a:xfrm>
             <a:off x="0" y="0"/>
-            <a:ext cx="9143640" cy="959760"/>
+            <a:ext cx="9143280" cy="959400"/>
           </a:xfrm>
           <a:prstGeom prst="rect">
             <a:avLst/>
@@ -12219,7 +11966,7 @@
         <p:spPr>
           <a:xfrm>
             <a:off x="0" y="960120"/>
-            <a:ext cx="9143640" cy="54360"/>
+            <a:ext cx="9143280" cy="54000"/>
           </a:xfrm>
           <a:prstGeom prst="rect">
             <a:avLst/>
@@ -12251,7 +11998,7 @@
         <p:spPr>
           <a:xfrm>
             <a:off x="320040" y="182880"/>
-            <a:ext cx="548280" cy="548280"/>
+            <a:ext cx="547920" cy="547920"/>
           </a:xfrm>
           <a:prstGeom prst="rect">
             <a:avLst/>
@@ -12270,7 +12017,7 @@
         <p:spPr>
           <a:xfrm>
             <a:off x="1005840" y="182880"/>
-            <a:ext cx="7772040" cy="594000"/>
+            <a:ext cx="7771680" cy="593640"/>
           </a:xfrm>
           <a:prstGeom prst="rect">
             <a:avLst/>
@@ -12325,7 +12072,7 @@
         <p:spPr>
           <a:xfrm>
             <a:off x="320040" y="1115640"/>
-            <a:ext cx="8503560" cy="529920"/>
+            <a:ext cx="8503200" cy="529560"/>
           </a:xfrm>
           <a:prstGeom prst="rect">
             <a:avLst/>
@@ -12355,7 +12102,7 @@
         <p:spPr>
           <a:xfrm>
             <a:off x="320040" y="1115640"/>
-            <a:ext cx="63720" cy="529920"/>
+            <a:ext cx="63360" cy="529560"/>
           </a:xfrm>
           <a:prstGeom prst="rect">
             <a:avLst/>
@@ -12383,7 +12130,7 @@
         <p:spPr>
           <a:xfrm>
             <a:off x="475560" y="1207080"/>
-            <a:ext cx="8229240" cy="347040"/>
+            <a:ext cx="8228880" cy="346680"/>
           </a:xfrm>
           <a:prstGeom prst="rect">
             <a:avLst/>
@@ -12438,7 +12185,7 @@
         <p:spPr>
           <a:xfrm>
             <a:off x="320040" y="1920240"/>
-            <a:ext cx="4937400" cy="2559960"/>
+            <a:ext cx="4937040" cy="2559600"/>
           </a:xfrm>
           <a:prstGeom prst="rect">
             <a:avLst/>
@@ -12473,7 +12220,7 @@
         <p:spPr>
           <a:xfrm>
             <a:off x="540000" y="1620000"/>
-            <a:ext cx="4754520" cy="237240"/>
+            <a:ext cx="4754160" cy="236880"/>
           </a:xfrm>
           <a:prstGeom prst="rect">
             <a:avLst/>
@@ -12528,7 +12275,7 @@
         <p:spPr>
           <a:xfrm>
             <a:off x="457200" y="2267640"/>
-            <a:ext cx="4736160" cy="2102760"/>
+            <a:ext cx="4735800" cy="2102400"/>
           </a:xfrm>
           <a:prstGeom prst="rect">
             <a:avLst/>
@@ -12923,7 +12670,7 @@
         <p:spPr>
           <a:xfrm>
             <a:off x="320040" y="4572000"/>
-            <a:ext cx="4937400" cy="502560"/>
+            <a:ext cx="4937040" cy="502200"/>
           </a:xfrm>
           <a:prstGeom prst="rect">
             <a:avLst/>
@@ -12951,7 +12698,7 @@
         <p:spPr>
           <a:xfrm>
             <a:off x="457200" y="4626720"/>
-            <a:ext cx="4754520" cy="219240"/>
+            <a:ext cx="4754160" cy="218880"/>
           </a:xfrm>
           <a:prstGeom prst="rect">
             <a:avLst/>
@@ -13006,7 +12753,7 @@
         <p:spPr>
           <a:xfrm>
             <a:off x="457200" y="4864680"/>
-            <a:ext cx="4736160" cy="155160"/>
+            <a:ext cx="4735800" cy="154800"/>
           </a:xfrm>
           <a:prstGeom prst="rect">
             <a:avLst/>
@@ -13109,7 +12856,7 @@
         <p:spPr>
           <a:xfrm>
             <a:off x="5440680" y="1783080"/>
-            <a:ext cx="3382920" cy="2697120"/>
+            <a:ext cx="3382560" cy="2696760"/>
           </a:xfrm>
           <a:prstGeom prst="rect">
             <a:avLst/>
@@ -13144,7 +12891,7 @@
         <p:spPr>
           <a:xfrm>
             <a:off x="5440680" y="1783080"/>
-            <a:ext cx="3382920" cy="456840"/>
+            <a:ext cx="3382560" cy="456480"/>
           </a:xfrm>
           <a:prstGeom prst="rect">
             <a:avLst/>
@@ -13172,7 +12919,7 @@
         <p:spPr>
           <a:xfrm>
             <a:off x="5577840" y="1837800"/>
-            <a:ext cx="3108600" cy="347040"/>
+            <a:ext cx="3108240" cy="346680"/>
           </a:xfrm>
           <a:prstGeom prst="rect">
             <a:avLst/>
@@ -13227,7 +12974,7 @@
         <p:spPr>
           <a:xfrm>
             <a:off x="5532120" y="2340720"/>
-            <a:ext cx="3200040" cy="566640"/>
+            <a:ext cx="3199680" cy="566280"/>
           </a:xfrm>
           <a:prstGeom prst="rect">
             <a:avLst/>
@@ -13255,7 +13002,7 @@
         <p:spPr>
           <a:xfrm>
             <a:off x="5532120" y="2340720"/>
-            <a:ext cx="54360" cy="566640"/>
+            <a:ext cx="54000" cy="566280"/>
           </a:xfrm>
           <a:prstGeom prst="rect">
             <a:avLst/>
@@ -13283,7 +13030,7 @@
         <p:spPr>
           <a:xfrm>
             <a:off x="5650920" y="2368440"/>
-            <a:ext cx="3017160" cy="200880"/>
+            <a:ext cx="3016800" cy="200520"/>
           </a:xfrm>
           <a:prstGeom prst="rect">
             <a:avLst/>
@@ -13338,7 +13085,7 @@
         <p:spPr>
           <a:xfrm>
             <a:off x="5650920" y="2560320"/>
-            <a:ext cx="3017160" cy="273960"/>
+            <a:ext cx="3016800" cy="273600"/>
           </a:xfrm>
           <a:prstGeom prst="rect">
             <a:avLst/>
@@ -13393,7 +13140,7 @@
         <p:spPr>
           <a:xfrm>
             <a:off x="5532120" y="2999160"/>
-            <a:ext cx="3200040" cy="566640"/>
+            <a:ext cx="3199680" cy="566280"/>
           </a:xfrm>
           <a:prstGeom prst="rect">
             <a:avLst/>
@@ -13421,7 +13168,7 @@
         <p:spPr>
           <a:xfrm>
             <a:off x="5532120" y="2999160"/>
-            <a:ext cx="54360" cy="566640"/>
+            <a:ext cx="54000" cy="566280"/>
           </a:xfrm>
           <a:prstGeom prst="rect">
             <a:avLst/>
@@ -13449,7 +13196,7 @@
         <p:spPr>
           <a:xfrm>
             <a:off x="5650920" y="3026520"/>
-            <a:ext cx="3017160" cy="200880"/>
+            <a:ext cx="3016800" cy="200520"/>
           </a:xfrm>
           <a:prstGeom prst="rect">
             <a:avLst/>
@@ -13504,7 +13251,7 @@
         <p:spPr>
           <a:xfrm>
             <a:off x="5650920" y="3218760"/>
-            <a:ext cx="3017160" cy="273960"/>
+            <a:ext cx="3016800" cy="273600"/>
           </a:xfrm>
           <a:prstGeom prst="rect">
             <a:avLst/>
@@ -13569,7 +13316,7 @@
         <p:spPr>
           <a:xfrm>
             <a:off x="5532120" y="3657600"/>
-            <a:ext cx="3200040" cy="566640"/>
+            <a:ext cx="3199680" cy="566280"/>
           </a:xfrm>
           <a:prstGeom prst="rect">
             <a:avLst/>
@@ -13597,7 +13344,7 @@
         <p:spPr>
           <a:xfrm>
             <a:off x="5532120" y="3657600"/>
-            <a:ext cx="54360" cy="566640"/>
+            <a:ext cx="54000" cy="566280"/>
           </a:xfrm>
           <a:prstGeom prst="rect">
             <a:avLst/>
@@ -13625,7 +13372,7 @@
         <p:spPr>
           <a:xfrm>
             <a:off x="5650920" y="3684960"/>
-            <a:ext cx="3017160" cy="200880"/>
+            <a:ext cx="3016800" cy="200520"/>
           </a:xfrm>
           <a:prstGeom prst="rect">
             <a:avLst/>
@@ -13680,7 +13427,7 @@
         <p:spPr>
           <a:xfrm>
             <a:off x="5650920" y="3877200"/>
-            <a:ext cx="3017160" cy="273960"/>
+            <a:ext cx="3016800" cy="273600"/>
           </a:xfrm>
           <a:prstGeom prst="rect">
             <a:avLst/>
@@ -13745,7 +13492,7 @@
         <p:spPr>
           <a:xfrm>
             <a:off x="5532120" y="4316040"/>
-            <a:ext cx="3200040" cy="566640"/>
+            <a:ext cx="3199680" cy="566280"/>
           </a:xfrm>
           <a:prstGeom prst="rect">
             <a:avLst/>
@@ -13773,7 +13520,7 @@
         <p:spPr>
           <a:xfrm>
             <a:off x="5532120" y="4316040"/>
-            <a:ext cx="54360" cy="566640"/>
+            <a:ext cx="54000" cy="566280"/>
           </a:xfrm>
           <a:prstGeom prst="rect">
             <a:avLst/>
@@ -13801,7 +13548,7 @@
         <p:spPr>
           <a:xfrm>
             <a:off x="5650920" y="4343400"/>
-            <a:ext cx="3017160" cy="200880"/>
+            <a:ext cx="3016800" cy="200520"/>
           </a:xfrm>
           <a:prstGeom prst="rect">
             <a:avLst/>
@@ -13856,7 +13603,7 @@
         <p:spPr>
           <a:xfrm>
             <a:off x="5650920" y="4535280"/>
-            <a:ext cx="3017160" cy="273960"/>
+            <a:ext cx="3016800" cy="273600"/>
           </a:xfrm>
           <a:prstGeom prst="rect">
             <a:avLst/>
@@ -13911,7 +13658,7 @@
         <p:spPr>
           <a:xfrm>
             <a:off x="5440680" y="4572000"/>
-            <a:ext cx="3382920" cy="502560"/>
+            <a:ext cx="3382560" cy="502200"/>
           </a:xfrm>
           <a:prstGeom prst="rect">
             <a:avLst/>
@@ -13941,7 +13688,7 @@
         <p:spPr>
           <a:xfrm>
             <a:off x="5440680" y="4572000"/>
-            <a:ext cx="54360" cy="502560"/>
+            <a:ext cx="54000" cy="502200"/>
           </a:xfrm>
           <a:prstGeom prst="rect">
             <a:avLst/>
@@ -13973,7 +13720,7 @@
         <p:spPr>
           <a:xfrm>
             <a:off x="5541120" y="4663440"/>
-            <a:ext cx="200880" cy="200880"/>
+            <a:ext cx="200520" cy="200520"/>
           </a:xfrm>
           <a:prstGeom prst="rect">
             <a:avLst/>
@@ -13992,7 +13739,7 @@
         <p:spPr>
           <a:xfrm>
             <a:off x="5806440" y="4626720"/>
-            <a:ext cx="2925720" cy="347040"/>
+            <a:ext cx="2925360" cy="346680"/>
           </a:xfrm>
           <a:prstGeom prst="rect">
             <a:avLst/>
@@ -14084,7 +13831,7 @@
         <p:spPr>
           <a:xfrm>
             <a:off x="0" y="0"/>
-            <a:ext cx="9143640" cy="5143320"/>
+            <a:ext cx="9143280" cy="5142960"/>
           </a:xfrm>
           <a:prstGeom prst="rect">
             <a:avLst/>
@@ -14112,7 +13859,7 @@
         <p:spPr>
           <a:xfrm>
             <a:off x="-1371600" y="-1371600"/>
-            <a:ext cx="4571640" cy="4571640"/>
+            <a:ext cx="4571280" cy="4571280"/>
           </a:xfrm>
           <a:prstGeom prst="ellipse">
             <a:avLst/>
@@ -14140,7 +13887,7 @@
         <p:spPr>
           <a:xfrm>
             <a:off x="5943600" y="2286000"/>
-            <a:ext cx="4114440" cy="4114440"/>
+            <a:ext cx="4114080" cy="4114080"/>
           </a:xfrm>
           <a:prstGeom prst="ellipse">
             <a:avLst/>
@@ -14168,7 +13915,7 @@
         <p:spPr>
           <a:xfrm>
             <a:off x="4023360" y="2103120"/>
-            <a:ext cx="1096920" cy="54360"/>
+            <a:ext cx="1096560" cy="54000"/>
           </a:xfrm>
           <a:prstGeom prst="rect">
             <a:avLst/>
@@ -14196,7 +13943,7 @@
         <p:spPr>
           <a:xfrm>
             <a:off x="4023360" y="1554480"/>
-            <a:ext cx="4571640" cy="411120"/>
+            <a:ext cx="4571280" cy="410760"/>
           </a:xfrm>
           <a:prstGeom prst="rect">
             <a:avLst/>
@@ -14227,7 +13974,7 @@
               </a:tabLst>
             </a:pPr>
             <a:r>
-              <a:rPr b="1" lang="en-US" sz="1300" spc="599" strike="noStrike">
+              <a:rPr b="1" lang="en-US" sz="1300" spc="596" strike="noStrike">
                 <a:solidFill>
                   <a:srgbClr val="48cae4"/>
                 </a:solidFill>
@@ -14251,7 +13998,7 @@
         <p:spPr>
           <a:xfrm>
             <a:off x="4023360" y="2194560"/>
-            <a:ext cx="4754520" cy="1188360"/>
+            <a:ext cx="4754160" cy="1188000"/>
           </a:xfrm>
           <a:prstGeom prst="rect">
             <a:avLst/>
@@ -14330,7 +14077,7 @@
         <p:spPr>
           <a:xfrm>
             <a:off x="4023360" y="3456360"/>
-            <a:ext cx="4754520" cy="822600"/>
+            <a:ext cx="4754160" cy="822240"/>
           </a:xfrm>
           <a:prstGeom prst="rect">
             <a:avLst/>
@@ -14389,7 +14136,7 @@
         <p:spPr>
           <a:xfrm>
             <a:off x="1005840" y="1463040"/>
-            <a:ext cx="1462680" cy="1462680"/>
+            <a:ext cx="1462320" cy="1462320"/>
           </a:xfrm>
           <a:prstGeom prst="rect">
             <a:avLst/>
@@ -14445,7 +14192,7 @@
         <p:spPr>
           <a:xfrm>
             <a:off x="0" y="0"/>
-            <a:ext cx="9143640" cy="959760"/>
+            <a:ext cx="9143280" cy="959400"/>
           </a:xfrm>
           <a:prstGeom prst="rect">
             <a:avLst/>
@@ -14473,7 +14220,7 @@
         <p:spPr>
           <a:xfrm>
             <a:off x="0" y="960120"/>
-            <a:ext cx="9143640" cy="54360"/>
+            <a:ext cx="9143280" cy="54000"/>
           </a:xfrm>
           <a:prstGeom prst="rect">
             <a:avLst/>
@@ -14505,7 +14252,7 @@
         <p:spPr>
           <a:xfrm>
             <a:off x="320040" y="182880"/>
-            <a:ext cx="548280" cy="548280"/>
+            <a:ext cx="547920" cy="547920"/>
           </a:xfrm>
           <a:prstGeom prst="rect">
             <a:avLst/>
@@ -14524,7 +14271,7 @@
         <p:spPr>
           <a:xfrm>
             <a:off x="1005840" y="182880"/>
-            <a:ext cx="7772040" cy="594000"/>
+            <a:ext cx="7771680" cy="593640"/>
           </a:xfrm>
           <a:prstGeom prst="rect">
             <a:avLst/>
@@ -14579,7 +14326,7 @@
         <p:spPr>
           <a:xfrm>
             <a:off x="320040" y="1078920"/>
-            <a:ext cx="4899960" cy="5941080"/>
+            <a:ext cx="4899600" cy="5940720"/>
           </a:xfrm>
           <a:prstGeom prst="rect">
             <a:avLst/>
@@ -14614,7 +14361,7 @@
         <p:spPr>
           <a:xfrm>
             <a:off x="457200" y="1188720"/>
-            <a:ext cx="4827600" cy="2834280"/>
+            <a:ext cx="4827240" cy="2833920"/>
           </a:xfrm>
           <a:prstGeom prst="rect">
             <a:avLst/>
@@ -15377,7 +15124,7 @@
         <p:spPr>
           <a:xfrm>
             <a:off x="320040" y="5580000"/>
-            <a:ext cx="5028840" cy="712800"/>
+            <a:ext cx="5028480" cy="712440"/>
           </a:xfrm>
           <a:prstGeom prst="rect">
             <a:avLst/>
@@ -15405,7 +15152,7 @@
         <p:spPr>
           <a:xfrm>
             <a:off x="457200" y="4260960"/>
-            <a:ext cx="4845960" cy="219240"/>
+            <a:ext cx="4845600" cy="218880"/>
           </a:xfrm>
           <a:prstGeom prst="rect">
             <a:avLst/>
@@ -15460,7 +15207,7 @@
         <p:spPr>
           <a:xfrm>
             <a:off x="457200" y="4498920"/>
-            <a:ext cx="4827600" cy="365400"/>
+            <a:ext cx="4827240" cy="365040"/>
           </a:xfrm>
           <a:prstGeom prst="rect">
             <a:avLst/>
@@ -15749,7 +15496,7 @@
         <p:spPr>
           <a:xfrm>
             <a:off x="5486400" y="1097280"/>
-            <a:ext cx="3337200" cy="3821760"/>
+            <a:ext cx="3336840" cy="3821400"/>
           </a:xfrm>
           <a:prstGeom prst="rect">
             <a:avLst/>
@@ -15784,7 +15531,7 @@
         <p:spPr>
           <a:xfrm>
             <a:off x="5486400" y="1097280"/>
-            <a:ext cx="3337200" cy="456840"/>
+            <a:ext cx="3336840" cy="456480"/>
           </a:xfrm>
           <a:prstGeom prst="rect">
             <a:avLst/>
@@ -15812,7 +15559,7 @@
         <p:spPr>
           <a:xfrm>
             <a:off x="5623560" y="1152000"/>
-            <a:ext cx="3062880" cy="347040"/>
+            <a:ext cx="3062520" cy="346680"/>
           </a:xfrm>
           <a:prstGeom prst="rect">
             <a:avLst/>
@@ -15867,7 +15614,7 @@
         <p:spPr>
           <a:xfrm>
             <a:off x="5559480" y="1664280"/>
-            <a:ext cx="3181680" cy="639720"/>
+            <a:ext cx="3181320" cy="639360"/>
           </a:xfrm>
           <a:prstGeom prst="rect">
             <a:avLst/>
@@ -15895,7 +15642,7 @@
         <p:spPr>
           <a:xfrm>
             <a:off x="5559480" y="1664280"/>
-            <a:ext cx="54360" cy="639720"/>
+            <a:ext cx="54000" cy="639360"/>
           </a:xfrm>
           <a:prstGeom prst="rect">
             <a:avLst/>
@@ -15923,7 +15670,7 @@
         <p:spPr>
           <a:xfrm>
             <a:off x="5678280" y="1710000"/>
-            <a:ext cx="2925720" cy="219240"/>
+            <a:ext cx="2925360" cy="218880"/>
           </a:xfrm>
           <a:prstGeom prst="rect">
             <a:avLst/>
@@ -15978,7 +15725,7 @@
         <p:spPr>
           <a:xfrm>
             <a:off x="5678280" y="1911240"/>
-            <a:ext cx="2925720" cy="319680"/>
+            <a:ext cx="2925360" cy="319320"/>
           </a:xfrm>
           <a:prstGeom prst="rect">
             <a:avLst/>
@@ -16033,7 +15780,7 @@
         <p:spPr>
           <a:xfrm>
             <a:off x="5559480" y="2414160"/>
-            <a:ext cx="3181680" cy="639720"/>
+            <a:ext cx="3181320" cy="639360"/>
           </a:xfrm>
           <a:prstGeom prst="rect">
             <a:avLst/>
@@ -16061,7 +15808,7 @@
         <p:spPr>
           <a:xfrm>
             <a:off x="5559480" y="2414160"/>
-            <a:ext cx="54360" cy="639720"/>
+            <a:ext cx="54000" cy="639360"/>
           </a:xfrm>
           <a:prstGeom prst="rect">
             <a:avLst/>
@@ -16089,7 +15836,7 @@
         <p:spPr>
           <a:xfrm>
             <a:off x="5678280" y="2459880"/>
-            <a:ext cx="2925720" cy="219240"/>
+            <a:ext cx="2925360" cy="218880"/>
           </a:xfrm>
           <a:prstGeom prst="rect">
             <a:avLst/>
@@ -16144,7 +15891,7 @@
         <p:spPr>
           <a:xfrm>
             <a:off x="5678280" y="2660760"/>
-            <a:ext cx="2925720" cy="319680"/>
+            <a:ext cx="2925360" cy="319320"/>
           </a:xfrm>
           <a:prstGeom prst="rect">
             <a:avLst/>
@@ -16199,7 +15946,7 @@
         <p:spPr>
           <a:xfrm>
             <a:off x="5559480" y="3163680"/>
-            <a:ext cx="3181680" cy="456840"/>
+            <a:ext cx="3181320" cy="456480"/>
           </a:xfrm>
           <a:prstGeom prst="rect">
             <a:avLst/>
@@ -16227,7 +15974,7 @@
         <p:spPr>
           <a:xfrm>
             <a:off x="5559480" y="3163680"/>
-            <a:ext cx="54360" cy="456840"/>
+            <a:ext cx="54000" cy="456480"/>
           </a:xfrm>
           <a:prstGeom prst="rect">
             <a:avLst/>
@@ -16255,7 +16002,7 @@
         <p:spPr>
           <a:xfrm>
             <a:off x="5678280" y="3200400"/>
-            <a:ext cx="2925720" cy="182520"/>
+            <a:ext cx="2925360" cy="182160"/>
           </a:xfrm>
           <a:prstGeom prst="rect">
             <a:avLst/>
@@ -16310,7 +16057,7 @@
         <p:spPr>
           <a:xfrm>
             <a:off x="5678280" y="3364920"/>
-            <a:ext cx="2925720" cy="200880"/>
+            <a:ext cx="2925360" cy="200520"/>
           </a:xfrm>
           <a:prstGeom prst="rect">
             <a:avLst/>
@@ -16365,7 +16112,7 @@
         <p:spPr>
           <a:xfrm>
             <a:off x="5559480" y="3694320"/>
-            <a:ext cx="3181680" cy="456840"/>
+            <a:ext cx="3181320" cy="456480"/>
           </a:xfrm>
           <a:prstGeom prst="rect">
             <a:avLst/>
@@ -16393,7 +16140,7 @@
         <p:spPr>
           <a:xfrm>
             <a:off x="5559480" y="3694320"/>
-            <a:ext cx="54360" cy="456840"/>
+            <a:ext cx="54000" cy="456480"/>
           </a:xfrm>
           <a:prstGeom prst="rect">
             <a:avLst/>
@@ -16421,7 +16168,7 @@
         <p:spPr>
           <a:xfrm>
             <a:off x="5678280" y="3730680"/>
-            <a:ext cx="2925720" cy="182520"/>
+            <a:ext cx="2925360" cy="182160"/>
           </a:xfrm>
           <a:prstGeom prst="rect">
             <a:avLst/>
@@ -16476,7 +16223,7 @@
         <p:spPr>
           <a:xfrm>
             <a:off x="5678280" y="3895200"/>
-            <a:ext cx="2925720" cy="200880"/>
+            <a:ext cx="2925360" cy="200520"/>
           </a:xfrm>
           <a:prstGeom prst="rect">
             <a:avLst/>
@@ -16531,7 +16278,7 @@
         <p:spPr>
           <a:xfrm>
             <a:off x="5559480" y="4224600"/>
-            <a:ext cx="3181680" cy="456840"/>
+            <a:ext cx="3181320" cy="456480"/>
           </a:xfrm>
           <a:prstGeom prst="rect">
             <a:avLst/>
@@ -16559,7 +16306,7 @@
         <p:spPr>
           <a:xfrm>
             <a:off x="5559480" y="4224600"/>
-            <a:ext cx="54360" cy="456840"/>
+            <a:ext cx="54000" cy="456480"/>
           </a:xfrm>
           <a:prstGeom prst="rect">
             <a:avLst/>
@@ -16587,7 +16334,7 @@
         <p:spPr>
           <a:xfrm>
             <a:off x="5678280" y="4260960"/>
-            <a:ext cx="2925720" cy="182520"/>
+            <a:ext cx="2925360" cy="182160"/>
           </a:xfrm>
           <a:prstGeom prst="rect">
             <a:avLst/>
@@ -16642,7 +16389,7 @@
         <p:spPr>
           <a:xfrm>
             <a:off x="5678280" y="4425840"/>
-            <a:ext cx="2925720" cy="200880"/>
+            <a:ext cx="2925360" cy="200520"/>
           </a:xfrm>
           <a:prstGeom prst="rect">
             <a:avLst/>
@@ -16734,7 +16481,7 @@
         <p:spPr>
           <a:xfrm>
             <a:off x="0" y="0"/>
-            <a:ext cx="9143640" cy="959760"/>
+            <a:ext cx="9143280" cy="959400"/>
           </a:xfrm>
           <a:prstGeom prst="rect">
             <a:avLst/>
@@ -16762,7 +16509,7 @@
         <p:spPr>
           <a:xfrm>
             <a:off x="0" y="960120"/>
-            <a:ext cx="9143640" cy="54360"/>
+            <a:ext cx="9143280" cy="54000"/>
           </a:xfrm>
           <a:prstGeom prst="rect">
             <a:avLst/>
@@ -16794,7 +16541,7 @@
         <p:spPr>
           <a:xfrm>
             <a:off x="320040" y="182880"/>
-            <a:ext cx="548280" cy="548280"/>
+            <a:ext cx="547920" cy="547920"/>
           </a:xfrm>
           <a:prstGeom prst="rect">
             <a:avLst/>
@@ -16813,7 +16560,7 @@
         <p:spPr>
           <a:xfrm>
             <a:off x="1005840" y="182880"/>
-            <a:ext cx="7772040" cy="594000"/>
+            <a:ext cx="7771680" cy="593640"/>
           </a:xfrm>
           <a:prstGeom prst="rect">
             <a:avLst/>
@@ -16868,7 +16615,7 @@
         <p:spPr>
           <a:xfrm>
             <a:off x="320040" y="1078920"/>
-            <a:ext cx="5028840" cy="2505240"/>
+            <a:ext cx="5028480" cy="2504880"/>
           </a:xfrm>
           <a:prstGeom prst="rect">
             <a:avLst/>
@@ -16903,7 +16650,7 @@
         <p:spPr>
           <a:xfrm>
             <a:off x="457200" y="1188720"/>
-            <a:ext cx="4827600" cy="2304000"/>
+            <a:ext cx="4827240" cy="2303640"/>
           </a:xfrm>
           <a:prstGeom prst="rect">
             <a:avLst/>
@@ -17154,7 +16901,7 @@
         <p:spPr>
           <a:xfrm>
             <a:off x="320040" y="3675960"/>
-            <a:ext cx="5028840" cy="731160"/>
+            <a:ext cx="5028480" cy="730800"/>
           </a:xfrm>
           <a:prstGeom prst="rect">
             <a:avLst/>
@@ -17182,7 +16929,7 @@
         <p:spPr>
           <a:xfrm>
             <a:off x="457200" y="3730680"/>
-            <a:ext cx="4845960" cy="219240"/>
+            <a:ext cx="4845600" cy="218880"/>
           </a:xfrm>
           <a:prstGeom prst="rect">
             <a:avLst/>
@@ -17237,7 +16984,7 @@
         <p:spPr>
           <a:xfrm>
             <a:off x="457200" y="3968640"/>
-            <a:ext cx="4827600" cy="383760"/>
+            <a:ext cx="4827240" cy="383400"/>
           </a:xfrm>
           <a:prstGeom prst="rect">
             <a:avLst/>
@@ -17340,7 +17087,7 @@
         <p:spPr>
           <a:xfrm>
             <a:off x="5486400" y="1097280"/>
-            <a:ext cx="3337200" cy="3309840"/>
+            <a:ext cx="3336840" cy="3309480"/>
           </a:xfrm>
           <a:prstGeom prst="rect">
             <a:avLst/>
@@ -17375,7 +17122,7 @@
         <p:spPr>
           <a:xfrm>
             <a:off x="5486400" y="1097280"/>
-            <a:ext cx="3337200" cy="456840"/>
+            <a:ext cx="3336840" cy="456480"/>
           </a:xfrm>
           <a:prstGeom prst="rect">
             <a:avLst/>
@@ -17403,7 +17150,7 @@
         <p:spPr>
           <a:xfrm>
             <a:off x="5623560" y="1152000"/>
-            <a:ext cx="3062880" cy="347040"/>
+            <a:ext cx="3062520" cy="346680"/>
           </a:xfrm>
           <a:prstGeom prst="rect">
             <a:avLst/>
@@ -17458,7 +17205,7 @@
         <p:spPr>
           <a:xfrm>
             <a:off x="5559480" y="1664280"/>
-            <a:ext cx="3181680" cy="1115280"/>
+            <a:ext cx="3181320" cy="1114920"/>
           </a:xfrm>
           <a:prstGeom prst="rect">
             <a:avLst/>
@@ -17486,7 +17233,7 @@
         <p:spPr>
           <a:xfrm>
             <a:off x="5559480" y="1664280"/>
-            <a:ext cx="54360" cy="1115280"/>
+            <a:ext cx="54000" cy="1114920"/>
           </a:xfrm>
           <a:prstGeom prst="rect">
             <a:avLst/>
@@ -17514,7 +17261,7 @@
         <p:spPr>
           <a:xfrm>
             <a:off x="5678280" y="1700640"/>
-            <a:ext cx="2925720" cy="237240"/>
+            <a:ext cx="2925360" cy="236880"/>
           </a:xfrm>
           <a:prstGeom prst="rect">
             <a:avLst/>
@@ -17569,7 +17316,7 @@
         <p:spPr>
           <a:xfrm>
             <a:off x="5678280" y="1920240"/>
-            <a:ext cx="2925720" cy="767880"/>
+            <a:ext cx="2925360" cy="767520"/>
           </a:xfrm>
           <a:prstGeom prst="rect">
             <a:avLst/>
@@ -17672,7 +17419,7 @@
         <p:spPr>
           <a:xfrm>
             <a:off x="5559480" y="2889360"/>
-            <a:ext cx="3181680" cy="1115280"/>
+            <a:ext cx="3181320" cy="1114920"/>
           </a:xfrm>
           <a:prstGeom prst="rect">
             <a:avLst/>
@@ -17700,7 +17447,7 @@
         <p:spPr>
           <a:xfrm>
             <a:off x="5559480" y="2889360"/>
-            <a:ext cx="54360" cy="1115280"/>
+            <a:ext cx="54000" cy="1114920"/>
           </a:xfrm>
           <a:prstGeom prst="rect">
             <a:avLst/>
@@ -17728,7 +17475,7 @@
         <p:spPr>
           <a:xfrm>
             <a:off x="5678280" y="2926080"/>
-            <a:ext cx="2925720" cy="237240"/>
+            <a:ext cx="2925360" cy="236880"/>
           </a:xfrm>
           <a:prstGeom prst="rect">
             <a:avLst/>
@@ -17783,7 +17530,7 @@
         <p:spPr>
           <a:xfrm>
             <a:off x="5678280" y="3145680"/>
-            <a:ext cx="2925720" cy="767880"/>
+            <a:ext cx="2925360" cy="767520"/>
           </a:xfrm>
           <a:prstGeom prst="rect">
             <a:avLst/>
@@ -17886,7 +17633,7 @@
         <p:spPr>
           <a:xfrm>
             <a:off x="320040" y="4517280"/>
-            <a:ext cx="8503560" cy="292320"/>
+            <a:ext cx="8503200" cy="291960"/>
           </a:xfrm>
           <a:prstGeom prst="rect">
             <a:avLst/>
@@ -17920,7 +17667,7 @@
         <p:spPr>
           <a:xfrm>
             <a:off x="402480" y="4553640"/>
-            <a:ext cx="200880" cy="200880"/>
+            <a:ext cx="200520" cy="200520"/>
           </a:xfrm>
           <a:prstGeom prst="rect">
             <a:avLst/>
@@ -17939,7 +17686,7 @@
         <p:spPr>
           <a:xfrm>
             <a:off x="658440" y="4553640"/>
-            <a:ext cx="8046360" cy="219240"/>
+            <a:ext cx="8046000" cy="218880"/>
           </a:xfrm>
           <a:prstGeom prst="rect">
             <a:avLst/>
@@ -18031,7 +17778,7 @@
         <p:spPr>
           <a:xfrm>
             <a:off x="0" y="0"/>
-            <a:ext cx="9143640" cy="959760"/>
+            <a:ext cx="9143280" cy="959400"/>
           </a:xfrm>
           <a:prstGeom prst="rect">
             <a:avLst/>
@@ -18059,7 +17806,7 @@
         <p:spPr>
           <a:xfrm>
             <a:off x="0" y="960120"/>
-            <a:ext cx="9143640" cy="54360"/>
+            <a:ext cx="9143280" cy="54000"/>
           </a:xfrm>
           <a:prstGeom prst="rect">
             <a:avLst/>
@@ -18091,7 +17838,7 @@
         <p:spPr>
           <a:xfrm>
             <a:off x="320040" y="182880"/>
-            <a:ext cx="548280" cy="548280"/>
+            <a:ext cx="547920" cy="547920"/>
           </a:xfrm>
           <a:prstGeom prst="rect">
             <a:avLst/>
@@ -18110,7 +17857,7 @@
         <p:spPr>
           <a:xfrm>
             <a:off x="1005840" y="182880"/>
-            <a:ext cx="7772040" cy="594000"/>
+            <a:ext cx="7771680" cy="593640"/>
           </a:xfrm>
           <a:prstGeom prst="rect">
             <a:avLst/>
@@ -18165,7 +17912,7 @@
         <p:spPr>
           <a:xfrm>
             <a:off x="320040" y="1078920"/>
-            <a:ext cx="5028840" cy="3931560"/>
+            <a:ext cx="5028480" cy="3931200"/>
           </a:xfrm>
           <a:prstGeom prst="rect">
             <a:avLst/>
@@ -18200,7 +17947,7 @@
         <p:spPr>
           <a:xfrm>
             <a:off x="457200" y="1188720"/>
-            <a:ext cx="4827600" cy="3730320"/>
+            <a:ext cx="4827240" cy="3729960"/>
           </a:xfrm>
           <a:prstGeom prst="rect">
             <a:avLst/>
@@ -19127,7 +18874,7 @@
         <p:spPr>
           <a:xfrm>
             <a:off x="5486400" y="1097280"/>
-            <a:ext cx="3337200" cy="712800"/>
+            <a:ext cx="3336840" cy="712440"/>
           </a:xfrm>
           <a:prstGeom prst="rect">
             <a:avLst/>
@@ -19162,7 +18909,7 @@
         <p:spPr>
           <a:xfrm>
             <a:off x="5486400" y="1097280"/>
-            <a:ext cx="54360" cy="712800"/>
+            <a:ext cx="54000" cy="712440"/>
           </a:xfrm>
           <a:prstGeom prst="rect">
             <a:avLst/>
@@ -19190,7 +18937,7 @@
         <p:spPr>
           <a:xfrm>
             <a:off x="5605200" y="1134000"/>
-            <a:ext cx="3108600" cy="255600"/>
+            <a:ext cx="3108240" cy="255240"/>
           </a:xfrm>
           <a:prstGeom prst="rect">
             <a:avLst/>
@@ -19245,7 +18992,7 @@
         <p:spPr>
           <a:xfrm>
             <a:off x="5605200" y="1371600"/>
-            <a:ext cx="3108600" cy="347040"/>
+            <a:ext cx="3108240" cy="346680"/>
           </a:xfrm>
           <a:prstGeom prst="rect">
             <a:avLst/>
@@ -19300,7 +19047,7 @@
         <p:spPr>
           <a:xfrm>
             <a:off x="5486400" y="1901880"/>
-            <a:ext cx="3337200" cy="712800"/>
+            <a:ext cx="3336840" cy="712440"/>
           </a:xfrm>
           <a:prstGeom prst="rect">
             <a:avLst/>
@@ -19335,7 +19082,7 @@
         <p:spPr>
           <a:xfrm>
             <a:off x="5486400" y="1901880"/>
-            <a:ext cx="54360" cy="712800"/>
+            <a:ext cx="54000" cy="712440"/>
           </a:xfrm>
           <a:prstGeom prst="rect">
             <a:avLst/>
@@ -19363,7 +19110,7 @@
         <p:spPr>
           <a:xfrm>
             <a:off x="5605200" y="1938600"/>
-            <a:ext cx="3108600" cy="255600"/>
+            <a:ext cx="3108240" cy="255240"/>
           </a:xfrm>
           <a:prstGeom prst="rect">
             <a:avLst/>
@@ -19418,7 +19165,7 @@
         <p:spPr>
           <a:xfrm>
             <a:off x="5605200" y="2176200"/>
-            <a:ext cx="3108600" cy="347040"/>
+            <a:ext cx="3108240" cy="346680"/>
           </a:xfrm>
           <a:prstGeom prst="rect">
             <a:avLst/>
@@ -19473,7 +19220,7 @@
         <p:spPr>
           <a:xfrm>
             <a:off x="5486400" y="2706480"/>
-            <a:ext cx="3337200" cy="712800"/>
+            <a:ext cx="3336840" cy="712440"/>
           </a:xfrm>
           <a:prstGeom prst="rect">
             <a:avLst/>
@@ -19508,7 +19255,7 @@
         <p:spPr>
           <a:xfrm>
             <a:off x="5486400" y="2706480"/>
-            <a:ext cx="54360" cy="712800"/>
+            <a:ext cx="54000" cy="712440"/>
           </a:xfrm>
           <a:prstGeom prst="rect">
             <a:avLst/>
@@ -19536,7 +19283,7 @@
         <p:spPr>
           <a:xfrm>
             <a:off x="5605200" y="2743200"/>
-            <a:ext cx="3108600" cy="255600"/>
+            <a:ext cx="3108240" cy="255240"/>
           </a:xfrm>
           <a:prstGeom prst="rect">
             <a:avLst/>
@@ -19591,7 +19338,7 @@
         <p:spPr>
           <a:xfrm>
             <a:off x="5605200" y="2980800"/>
-            <a:ext cx="3108600" cy="347040"/>
+            <a:ext cx="3108240" cy="346680"/>
           </a:xfrm>
           <a:prstGeom prst="rect">
             <a:avLst/>
@@ -19646,7 +19393,7 @@
         <p:spPr>
           <a:xfrm>
             <a:off x="5486400" y="3511440"/>
-            <a:ext cx="3337200" cy="712800"/>
+            <a:ext cx="3336840" cy="712440"/>
           </a:xfrm>
           <a:prstGeom prst="rect">
             <a:avLst/>
@@ -19681,7 +19428,7 @@
         <p:spPr>
           <a:xfrm>
             <a:off x="5486400" y="3511440"/>
-            <a:ext cx="54360" cy="712800"/>
+            <a:ext cx="54000" cy="712440"/>
           </a:xfrm>
           <a:prstGeom prst="rect">
             <a:avLst/>
@@ -19709,7 +19456,7 @@
         <p:spPr>
           <a:xfrm>
             <a:off x="5605200" y="3547800"/>
-            <a:ext cx="3108600" cy="255600"/>
+            <a:ext cx="3108240" cy="255240"/>
           </a:xfrm>
           <a:prstGeom prst="rect">
             <a:avLst/>
@@ -19764,7 +19511,7 @@
         <p:spPr>
           <a:xfrm>
             <a:off x="5605200" y="3785760"/>
-            <a:ext cx="3108600" cy="347040"/>
+            <a:ext cx="3108240" cy="346680"/>
           </a:xfrm>
           <a:prstGeom prst="rect">
             <a:avLst/>
@@ -19819,7 +19566,7 @@
         <p:spPr>
           <a:xfrm>
             <a:off x="5486400" y="4316040"/>
-            <a:ext cx="3337200" cy="712800"/>
+            <a:ext cx="3336840" cy="712440"/>
           </a:xfrm>
           <a:prstGeom prst="rect">
             <a:avLst/>
@@ -19854,7 +19601,7 @@
         <p:spPr>
           <a:xfrm>
             <a:off x="5486400" y="4316040"/>
-            <a:ext cx="54360" cy="712800"/>
+            <a:ext cx="54000" cy="712440"/>
           </a:xfrm>
           <a:prstGeom prst="rect">
             <a:avLst/>
@@ -19882,7 +19629,7 @@
         <p:spPr>
           <a:xfrm>
             <a:off x="5605200" y="4352400"/>
-            <a:ext cx="3108600" cy="255600"/>
+            <a:ext cx="3108240" cy="255240"/>
           </a:xfrm>
           <a:prstGeom prst="rect">
             <a:avLst/>
@@ -19937,7 +19684,7 @@
         <p:spPr>
           <a:xfrm>
             <a:off x="5605200" y="4590360"/>
-            <a:ext cx="3108600" cy="347040"/>
+            <a:ext cx="3108240" cy="346680"/>
           </a:xfrm>
           <a:prstGeom prst="rect">
             <a:avLst/>
@@ -19992,7 +19739,7 @@
         <p:spPr>
           <a:xfrm>
             <a:off x="5486400" y="5120640"/>
-            <a:ext cx="3337200" cy="360"/>
+            <a:ext cx="3336840" cy="360"/>
           </a:xfrm>
           <a:prstGeom prst="rect">
             <a:avLst/>
@@ -20057,7 +19804,7 @@
         <p:spPr>
           <a:xfrm>
             <a:off x="0" y="0"/>
-            <a:ext cx="9143640" cy="959760"/>
+            <a:ext cx="9143280" cy="959400"/>
           </a:xfrm>
           <a:prstGeom prst="rect">
             <a:avLst/>
@@ -20085,7 +19832,7 @@
         <p:spPr>
           <a:xfrm>
             <a:off x="0" y="960120"/>
-            <a:ext cx="9143640" cy="54360"/>
+            <a:ext cx="9143280" cy="54000"/>
           </a:xfrm>
           <a:prstGeom prst="rect">
             <a:avLst/>
@@ -20117,7 +19864,7 @@
         <p:spPr>
           <a:xfrm>
             <a:off x="320040" y="182880"/>
-            <a:ext cx="548280" cy="548280"/>
+            <a:ext cx="547920" cy="547920"/>
           </a:xfrm>
           <a:prstGeom prst="rect">
             <a:avLst/>
@@ -20136,7 +19883,7 @@
         <p:spPr>
           <a:xfrm>
             <a:off x="1005840" y="182880"/>
-            <a:ext cx="7772040" cy="594000"/>
+            <a:ext cx="7771680" cy="593640"/>
           </a:xfrm>
           <a:prstGeom prst="rect">
             <a:avLst/>
@@ -20191,7 +19938,7 @@
         <p:spPr>
           <a:xfrm>
             <a:off x="320040" y="1115640"/>
-            <a:ext cx="8503560" cy="1325520"/>
+            <a:ext cx="8503200" cy="1325160"/>
           </a:xfrm>
           <a:prstGeom prst="rect">
             <a:avLst/>
@@ -20219,7 +19966,7 @@
         <p:spPr>
           <a:xfrm>
             <a:off x="457200" y="1161360"/>
-            <a:ext cx="4571640" cy="237240"/>
+            <a:ext cx="4571280" cy="236880"/>
           </a:xfrm>
           <a:prstGeom prst="rect">
             <a:avLst/>
@@ -20274,7 +20021,7 @@
         <p:spPr>
           <a:xfrm>
             <a:off x="457200" y="1389960"/>
-            <a:ext cx="8320680" cy="959760"/>
+            <a:ext cx="8320320" cy="959400"/>
           </a:xfrm>
           <a:prstGeom prst="rect">
             <a:avLst/>
@@ -20377,7 +20124,7 @@
         <p:spPr>
           <a:xfrm>
             <a:off x="320040" y="2578680"/>
-            <a:ext cx="4160160" cy="1416960"/>
+            <a:ext cx="4159800" cy="1416600"/>
           </a:xfrm>
           <a:prstGeom prst="rect">
             <a:avLst/>
@@ -20412,7 +20159,7 @@
         <p:spPr>
           <a:xfrm>
             <a:off x="457200" y="2651760"/>
-            <a:ext cx="3977280" cy="237240"/>
+            <a:ext cx="3976920" cy="236880"/>
           </a:xfrm>
           <a:prstGeom prst="rect">
             <a:avLst/>
@@ -20467,7 +20214,7 @@
         <p:spPr>
           <a:xfrm>
             <a:off x="457200" y="2926080"/>
-            <a:ext cx="3958920" cy="959760"/>
+            <a:ext cx="3958560" cy="959400"/>
           </a:xfrm>
           <a:prstGeom prst="rect">
             <a:avLst/>
@@ -20656,7 +20403,7 @@
         <p:spPr>
           <a:xfrm>
             <a:off x="4617720" y="2578680"/>
-            <a:ext cx="4205880" cy="2541600"/>
+            <a:ext cx="4205520" cy="2541240"/>
           </a:xfrm>
           <a:prstGeom prst="rect">
             <a:avLst/>
@@ -20691,7 +20438,7 @@
         <p:spPr>
           <a:xfrm>
             <a:off x="4754880" y="2651760"/>
-            <a:ext cx="3840120" cy="237240"/>
+            <a:ext cx="3839760" cy="236880"/>
           </a:xfrm>
           <a:prstGeom prst="rect">
             <a:avLst/>
@@ -20746,7 +20493,7 @@
         <p:spPr>
           <a:xfrm>
             <a:off x="4754880" y="2944440"/>
-            <a:ext cx="914040" cy="237240"/>
+            <a:ext cx="913680" cy="236880"/>
           </a:xfrm>
           <a:prstGeom prst="rect">
             <a:avLst/>
@@ -20801,7 +20548,7 @@
         <p:spPr>
           <a:xfrm>
             <a:off x="5669280" y="2944440"/>
-            <a:ext cx="3017160" cy="237240"/>
+            <a:ext cx="3016800" cy="236880"/>
           </a:xfrm>
           <a:prstGeom prst="rect">
             <a:avLst/>
@@ -20856,7 +20603,7 @@
         <p:spPr>
           <a:xfrm>
             <a:off x="4754880" y="3355920"/>
-            <a:ext cx="914040" cy="237240"/>
+            <a:ext cx="913680" cy="236880"/>
           </a:xfrm>
           <a:prstGeom prst="rect">
             <a:avLst/>
@@ -20911,7 +20658,7 @@
         <p:spPr>
           <a:xfrm>
             <a:off x="5669280" y="3355920"/>
-            <a:ext cx="3017160" cy="237240"/>
+            <a:ext cx="3016800" cy="236880"/>
           </a:xfrm>
           <a:prstGeom prst="rect">
             <a:avLst/>
@@ -20966,7 +20713,7 @@
         <p:spPr>
           <a:xfrm>
             <a:off x="4754880" y="3767400"/>
-            <a:ext cx="914040" cy="237240"/>
+            <a:ext cx="913680" cy="236880"/>
           </a:xfrm>
           <a:prstGeom prst="rect">
             <a:avLst/>
@@ -21021,7 +20768,7 @@
         <p:spPr>
           <a:xfrm>
             <a:off x="5669280" y="3767400"/>
-            <a:ext cx="3017160" cy="237240"/>
+            <a:ext cx="3016800" cy="236880"/>
           </a:xfrm>
           <a:prstGeom prst="rect">
             <a:avLst/>
@@ -21076,7 +20823,7 @@
         <p:spPr>
           <a:xfrm>
             <a:off x="4754880" y="4178880"/>
-            <a:ext cx="914040" cy="237240"/>
+            <a:ext cx="913680" cy="236880"/>
           </a:xfrm>
           <a:prstGeom prst="rect">
             <a:avLst/>
@@ -21131,7 +20878,7 @@
         <p:spPr>
           <a:xfrm>
             <a:off x="5669280" y="4178880"/>
-            <a:ext cx="3017160" cy="237240"/>
+            <a:ext cx="3016800" cy="236880"/>
           </a:xfrm>
           <a:prstGeom prst="rect">
             <a:avLst/>
@@ -21186,7 +20933,7 @@
         <p:spPr>
           <a:xfrm>
             <a:off x="4754880" y="4590360"/>
-            <a:ext cx="914040" cy="237240"/>
+            <a:ext cx="913680" cy="236880"/>
           </a:xfrm>
           <a:prstGeom prst="rect">
             <a:avLst/>
@@ -21241,7 +20988,7 @@
         <p:spPr>
           <a:xfrm>
             <a:off x="5669280" y="4590360"/>
-            <a:ext cx="3017160" cy="237240"/>
+            <a:ext cx="3016800" cy="236880"/>
           </a:xfrm>
           <a:prstGeom prst="rect">
             <a:avLst/>
@@ -21296,7 +21043,7 @@
         <p:spPr>
           <a:xfrm>
             <a:off x="320040" y="4096440"/>
-            <a:ext cx="8503560" cy="502560"/>
+            <a:ext cx="8503200" cy="502200"/>
           </a:xfrm>
           <a:prstGeom prst="rect">
             <a:avLst/>
@@ -21326,7 +21073,7 @@
         <p:spPr>
           <a:xfrm>
             <a:off x="320040" y="4096440"/>
-            <a:ext cx="54360" cy="502560"/>
+            <a:ext cx="54000" cy="502200"/>
           </a:xfrm>
           <a:prstGeom prst="rect">
             <a:avLst/>
@@ -21358,7 +21105,7 @@
         <p:spPr>
           <a:xfrm>
             <a:off x="438840" y="4187880"/>
-            <a:ext cx="200880" cy="200880"/>
+            <a:ext cx="200520" cy="200520"/>
           </a:xfrm>
           <a:prstGeom prst="rect">
             <a:avLst/>
@@ -21377,7 +21124,7 @@
         <p:spPr>
           <a:xfrm>
             <a:off x="713160" y="4151520"/>
-            <a:ext cx="8046360" cy="347040"/>
+            <a:ext cx="8046000" cy="346680"/>
           </a:xfrm>
           <a:prstGeom prst="rect">
             <a:avLst/>
